--- a/exports/pptx/lessons/middle-module-05-dot-addition/day-01-hook.pptx
+++ b/exports/pptx/lessons/middle-module-05-dot-addition/day-01-hook.pptx
@@ -19,9 +19,13 @@
     <p:sldId id="267" r:id="rId13"/>
     <p:sldId id="268" r:id="rId14"/>
     <p:sldId id="269" r:id="rId15"/>
+    <p:sldId id="270" r:id="rId16"/>
+    <p:sldId id="271" r:id="rId17"/>
+    <p:sldId id="272" r:id="rId18"/>
+    <p:sldId id="273" r:id="rId19"/>
   </p:sldIdLst>
   <p:notesMasterIdLst>
-    <p:notesMasterId r:id="rId16"/>
+    <p:notesMasterId r:id="rId20"/>
   </p:notesMasterIdLst>
   <p:sldSz cx="9144000" cy="5143500"/>
   <p:notesSz cx="5143500" cy="9144000"/>
@@ -979,6 +983,358 @@
             <a:fld id="{F7021451-1387-4CA6-816F-3879F97B5CBC}" type="slidenum">
               <a:rPr lang="en-US"/>
               <a:t>14</a:t>
+            </a:fld>
+            <a:endParaRPr lang="en-US"/>
+          </a:p>
+        </p:txBody>
+      </p:sp>
+    </p:spTree>
+    <p:extLst>
+      <p:ext uri="{BB962C8B-B14F-4D97-AF65-F5344CB8AC3E}">
+        <p14:creationId xmlns:p14="http://schemas.microsoft.com/office/powerpoint/2010/main" val="1024086991"/>
+      </p:ext>
+    </p:extLst>
+  </p:cSld>
+  <p:clrMapOvr>
+    <a:masterClrMapping/>
+  </p:clrMapOvr>
+</p:notes>
+</file>
+
+<file path=ppt/notesSlides/notesSlide15.xml><?xml version="1.0" encoding="utf-8"?>
+<p:notes xmlns:a="http://schemas.openxmlformats.org/drawingml/2006/main" xmlns:r="http://schemas.openxmlformats.org/officeDocument/2006/relationships" xmlns:p="http://schemas.openxmlformats.org/presentationml/2006/main">
+  <p:cSld>
+    <p:spTree>
+      <p:nvGrpSpPr>
+        <p:cNvPr id="1" name=""/>
+        <p:cNvGrpSpPr/>
+        <p:nvPr/>
+      </p:nvGrpSpPr>
+      <p:grpSpPr>
+        <a:xfrm>
+          <a:off x="0" y="0"/>
+          <a:ext cx="0" cy="0"/>
+          <a:chOff x="0" y="0"/>
+          <a:chExt cx="0" cy="0"/>
+        </a:xfrm>
+      </p:grpSpPr>
+      <p:sp>
+        <p:nvSpPr>
+          <p:cNvPr id="2" name="Slide Image Placeholder 1"/>
+          <p:cNvSpPr>
+            <a:spLocks noGrp="1" noRot="1" noChangeAspect="1"/>
+          </p:cNvSpPr>
+          <p:nvPr>
+            <p:ph type="sldImg"/>
+          </p:nvPr>
+        </p:nvSpPr>
+        <p:spPr/>
+      </p:sp>
+      <p:sp>
+        <p:nvSpPr>
+          <p:cNvPr id="3" name="Notes Placeholder 2"/>
+          <p:cNvSpPr>
+            <a:spLocks noGrp="1"/>
+          </p:cNvSpPr>
+          <p:nvPr>
+            <p:ph type="body" idx="1"/>
+          </p:nvPr>
+        </p:nvSpPr>
+        <p:spPr/>
+        <p:txBody>
+          <a:bodyPr/>
+          <a:lstStyle/>
+          <a:p>
+            <a:r>
+              <a:rPr lang="en-US" dirty="0"/>
+              <a:t/>
+            </a:r>
+            <a:endParaRPr lang="en-US" dirty="0"/>
+          </a:p>
+        </p:txBody>
+      </p:sp>
+      <p:sp>
+        <p:nvSpPr>
+          <p:cNvPr id="4" name="Slide Number Placeholder 3"/>
+          <p:cNvSpPr>
+            <a:spLocks noGrp="1"/>
+          </p:cNvSpPr>
+          <p:nvPr>
+            <p:ph type="sldNum" sz="quarter" idx="10"/>
+          </p:nvPr>
+        </p:nvSpPr>
+        <p:spPr/>
+        <p:txBody>
+          <a:bodyPr/>
+          <a:lstStyle/>
+          <a:p>
+            <a:fld id="{F7021451-1387-4CA6-816F-3879F97B5CBC}" type="slidenum">
+              <a:rPr lang="en-US"/>
+              <a:t>15</a:t>
+            </a:fld>
+            <a:endParaRPr lang="en-US"/>
+          </a:p>
+        </p:txBody>
+      </p:sp>
+    </p:spTree>
+    <p:extLst>
+      <p:ext uri="{BB962C8B-B14F-4D97-AF65-F5344CB8AC3E}">
+        <p14:creationId xmlns:p14="http://schemas.microsoft.com/office/powerpoint/2010/main" val="1024086991"/>
+      </p:ext>
+    </p:extLst>
+  </p:cSld>
+  <p:clrMapOvr>
+    <a:masterClrMapping/>
+  </p:clrMapOvr>
+</p:notes>
+</file>
+
+<file path=ppt/notesSlides/notesSlide16.xml><?xml version="1.0" encoding="utf-8"?>
+<p:notes xmlns:a="http://schemas.openxmlformats.org/drawingml/2006/main" xmlns:r="http://schemas.openxmlformats.org/officeDocument/2006/relationships" xmlns:p="http://schemas.openxmlformats.org/presentationml/2006/main">
+  <p:cSld>
+    <p:spTree>
+      <p:nvGrpSpPr>
+        <p:cNvPr id="1" name=""/>
+        <p:cNvGrpSpPr/>
+        <p:nvPr/>
+      </p:nvGrpSpPr>
+      <p:grpSpPr>
+        <a:xfrm>
+          <a:off x="0" y="0"/>
+          <a:ext cx="0" cy="0"/>
+          <a:chOff x="0" y="0"/>
+          <a:chExt cx="0" cy="0"/>
+        </a:xfrm>
+      </p:grpSpPr>
+      <p:sp>
+        <p:nvSpPr>
+          <p:cNvPr id="2" name="Slide Image Placeholder 1"/>
+          <p:cNvSpPr>
+            <a:spLocks noGrp="1" noRot="1" noChangeAspect="1"/>
+          </p:cNvSpPr>
+          <p:nvPr>
+            <p:ph type="sldImg"/>
+          </p:nvPr>
+        </p:nvSpPr>
+        <p:spPr/>
+      </p:sp>
+      <p:sp>
+        <p:nvSpPr>
+          <p:cNvPr id="3" name="Notes Placeholder 2"/>
+          <p:cNvSpPr>
+            <a:spLocks noGrp="1"/>
+          </p:cNvSpPr>
+          <p:nvPr>
+            <p:ph type="body" idx="1"/>
+          </p:nvPr>
+        </p:nvSpPr>
+        <p:spPr/>
+        <p:txBody>
+          <a:bodyPr/>
+          <a:lstStyle/>
+          <a:p>
+            <a:r>
+              <a:rPr lang="en-US" dirty="0"/>
+              <a:t/>
+            </a:r>
+            <a:endParaRPr lang="en-US" dirty="0"/>
+          </a:p>
+        </p:txBody>
+      </p:sp>
+      <p:sp>
+        <p:nvSpPr>
+          <p:cNvPr id="4" name="Slide Number Placeholder 3"/>
+          <p:cNvSpPr>
+            <a:spLocks noGrp="1"/>
+          </p:cNvSpPr>
+          <p:nvPr>
+            <p:ph type="sldNum" sz="quarter" idx="10"/>
+          </p:nvPr>
+        </p:nvSpPr>
+        <p:spPr/>
+        <p:txBody>
+          <a:bodyPr/>
+          <a:lstStyle/>
+          <a:p>
+            <a:fld id="{F7021451-1387-4CA6-816F-3879F97B5CBC}" type="slidenum">
+              <a:rPr lang="en-US"/>
+              <a:t>16</a:t>
+            </a:fld>
+            <a:endParaRPr lang="en-US"/>
+          </a:p>
+        </p:txBody>
+      </p:sp>
+    </p:spTree>
+    <p:extLst>
+      <p:ext uri="{BB962C8B-B14F-4D97-AF65-F5344CB8AC3E}">
+        <p14:creationId xmlns:p14="http://schemas.microsoft.com/office/powerpoint/2010/main" val="1024086991"/>
+      </p:ext>
+    </p:extLst>
+  </p:cSld>
+  <p:clrMapOvr>
+    <a:masterClrMapping/>
+  </p:clrMapOvr>
+</p:notes>
+</file>
+
+<file path=ppt/notesSlides/notesSlide17.xml><?xml version="1.0" encoding="utf-8"?>
+<p:notes xmlns:a="http://schemas.openxmlformats.org/drawingml/2006/main" xmlns:r="http://schemas.openxmlformats.org/officeDocument/2006/relationships" xmlns:p="http://schemas.openxmlformats.org/presentationml/2006/main">
+  <p:cSld>
+    <p:spTree>
+      <p:nvGrpSpPr>
+        <p:cNvPr id="1" name=""/>
+        <p:cNvGrpSpPr/>
+        <p:nvPr/>
+      </p:nvGrpSpPr>
+      <p:grpSpPr>
+        <a:xfrm>
+          <a:off x="0" y="0"/>
+          <a:ext cx="0" cy="0"/>
+          <a:chOff x="0" y="0"/>
+          <a:chExt cx="0" cy="0"/>
+        </a:xfrm>
+      </p:grpSpPr>
+      <p:sp>
+        <p:nvSpPr>
+          <p:cNvPr id="2" name="Slide Image Placeholder 1"/>
+          <p:cNvSpPr>
+            <a:spLocks noGrp="1" noRot="1" noChangeAspect="1"/>
+          </p:cNvSpPr>
+          <p:nvPr>
+            <p:ph type="sldImg"/>
+          </p:nvPr>
+        </p:nvSpPr>
+        <p:spPr/>
+      </p:sp>
+      <p:sp>
+        <p:nvSpPr>
+          <p:cNvPr id="3" name="Notes Placeholder 2"/>
+          <p:cNvSpPr>
+            <a:spLocks noGrp="1"/>
+          </p:cNvSpPr>
+          <p:nvPr>
+            <p:ph type="body" idx="1"/>
+          </p:nvPr>
+        </p:nvSpPr>
+        <p:spPr/>
+        <p:txBody>
+          <a:bodyPr/>
+          <a:lstStyle/>
+          <a:p>
+            <a:r>
+              <a:rPr lang="en-US" dirty="0"/>
+              <a:t/>
+            </a:r>
+            <a:endParaRPr lang="en-US" dirty="0"/>
+          </a:p>
+        </p:txBody>
+      </p:sp>
+      <p:sp>
+        <p:nvSpPr>
+          <p:cNvPr id="4" name="Slide Number Placeholder 3"/>
+          <p:cNvSpPr>
+            <a:spLocks noGrp="1"/>
+          </p:cNvSpPr>
+          <p:nvPr>
+            <p:ph type="sldNum" sz="quarter" idx="10"/>
+          </p:nvPr>
+        </p:nvSpPr>
+        <p:spPr/>
+        <p:txBody>
+          <a:bodyPr/>
+          <a:lstStyle/>
+          <a:p>
+            <a:fld id="{F7021451-1387-4CA6-816F-3879F97B5CBC}" type="slidenum">
+              <a:rPr lang="en-US"/>
+              <a:t>17</a:t>
+            </a:fld>
+            <a:endParaRPr lang="en-US"/>
+          </a:p>
+        </p:txBody>
+      </p:sp>
+    </p:spTree>
+    <p:extLst>
+      <p:ext uri="{BB962C8B-B14F-4D97-AF65-F5344CB8AC3E}">
+        <p14:creationId xmlns:p14="http://schemas.microsoft.com/office/powerpoint/2010/main" val="1024086991"/>
+      </p:ext>
+    </p:extLst>
+  </p:cSld>
+  <p:clrMapOvr>
+    <a:masterClrMapping/>
+  </p:clrMapOvr>
+</p:notes>
+</file>
+
+<file path=ppt/notesSlides/notesSlide18.xml><?xml version="1.0" encoding="utf-8"?>
+<p:notes xmlns:a="http://schemas.openxmlformats.org/drawingml/2006/main" xmlns:r="http://schemas.openxmlformats.org/officeDocument/2006/relationships" xmlns:p="http://schemas.openxmlformats.org/presentationml/2006/main">
+  <p:cSld>
+    <p:spTree>
+      <p:nvGrpSpPr>
+        <p:cNvPr id="1" name=""/>
+        <p:cNvGrpSpPr/>
+        <p:nvPr/>
+      </p:nvGrpSpPr>
+      <p:grpSpPr>
+        <a:xfrm>
+          <a:off x="0" y="0"/>
+          <a:ext cx="0" cy="0"/>
+          <a:chOff x="0" y="0"/>
+          <a:chExt cx="0" cy="0"/>
+        </a:xfrm>
+      </p:grpSpPr>
+      <p:sp>
+        <p:nvSpPr>
+          <p:cNvPr id="2" name="Slide Image Placeholder 1"/>
+          <p:cNvSpPr>
+            <a:spLocks noGrp="1" noRot="1" noChangeAspect="1"/>
+          </p:cNvSpPr>
+          <p:nvPr>
+            <p:ph type="sldImg"/>
+          </p:nvPr>
+        </p:nvSpPr>
+        <p:spPr/>
+      </p:sp>
+      <p:sp>
+        <p:nvSpPr>
+          <p:cNvPr id="3" name="Notes Placeholder 2"/>
+          <p:cNvSpPr>
+            <a:spLocks noGrp="1"/>
+          </p:cNvSpPr>
+          <p:nvPr>
+            <p:ph type="body" idx="1"/>
+          </p:nvPr>
+        </p:nvSpPr>
+        <p:spPr/>
+        <p:txBody>
+          <a:bodyPr/>
+          <a:lstStyle/>
+          <a:p>
+            <a:r>
+              <a:rPr lang="en-US" dirty="0"/>
+              <a:t/>
+            </a:r>
+            <a:endParaRPr lang="en-US" dirty="0"/>
+          </a:p>
+        </p:txBody>
+      </p:sp>
+      <p:sp>
+        <p:nvSpPr>
+          <p:cNvPr id="4" name="Slide Number Placeholder 3"/>
+          <p:cNvSpPr>
+            <a:spLocks noGrp="1"/>
+          </p:cNvSpPr>
+          <p:nvPr>
+            <p:ph type="sldNum" sz="quarter" idx="10"/>
+          </p:nvPr>
+        </p:nvSpPr>
+        <p:spPr/>
+        <p:txBody>
+          <a:bodyPr/>
+          <a:lstStyle/>
+          <a:p>
+            <a:fld id="{F7021451-1387-4CA6-816F-3879F97B5CBC}" type="slidenum">
+              <a:rPr lang="en-US"/>
+              <a:t>18</a:t>
             </a:fld>
             <a:endParaRPr lang="en-US"/>
           </a:p>
@@ -2278,102 +2634,6 @@
         </p:nvSpPr>
         <p:spPr>
           <a:xfrm>
-            <a:off x="406301" y="1223963"/>
-            <a:ext cx="8498026" cy="274290"/>
-          </a:xfrm>
-          <a:prstGeom prst="rect">
-            <a:avLst/>
-          </a:prstGeom>
-          <a:noFill/>
-          <a:ln/>
-        </p:spPr>
-        <p:txBody>
-          <a:bodyPr wrap="square" lIns="0" tIns="0" rIns="0" bIns="0" rtlCol="0" anchor="t"/>
-          <a:lstStyle/>
-          <a:p>
-            <a:pPr algn="l" indent="0" marL="0">
-              <a:lnSpc>
-                <a:spcPts val="2160"/>
-              </a:lnSpc>
-              <a:spcBef>
-                <a:spcPts val="600"/>
-              </a:spcBef>
-              <a:spcAft>
-                <a:spcPts val="800"/>
-              </a:spcAft>
-              <a:buNone/>
-            </a:pPr>
-            <a:r>
-              <a:rPr lang="en-US" sz="1800" b="1" dirty="0">
-                <a:solidFill>
-                  <a:srgbClr val="FE4447"/>
-                </a:solidFill>
-                <a:latin typeface="Georgia" pitchFamily="34" charset="0"/>
-                <a:ea typeface="Georgia" pitchFamily="34" charset="-122"/>
-                <a:cs typeface="Georgia" pitchFamily="34" charset="-120"/>
-              </a:rPr>
-              <a:t>Learning objective</a:t>
-            </a:r>
-            <a:endParaRPr lang="en-US" sz="1800" dirty="0"/>
-          </a:p>
-        </p:txBody>
-      </p:sp>
-      <p:sp>
-        <p:nvSpPr>
-          <p:cNvPr id="6" name="Text 4"/>
-          <p:cNvSpPr/>
-          <p:nvPr/>
-        </p:nvSpPr>
-        <p:spPr>
-          <a:xfrm>
-            <a:off x="406301" y="1637854"/>
-            <a:ext cx="8498026" cy="426541"/>
-          </a:xfrm>
-          <a:prstGeom prst="rect">
-            <a:avLst/>
-          </a:prstGeom>
-          <a:noFill/>
-          <a:ln/>
-        </p:spPr>
-        <p:txBody>
-          <a:bodyPr wrap="square" lIns="0" tIns="0" rIns="0" bIns="0" rtlCol="0" anchor="t"/>
-          <a:lstStyle/>
-          <a:p>
-            <a:pPr algn="l" indent="0" marL="0">
-              <a:lnSpc>
-                <a:spcPts val="1680"/>
-              </a:lnSpc>
-              <a:spcBef>
-                <a:spcPts val="300"/>
-              </a:spcBef>
-              <a:spcAft>
-                <a:spcPts val="300"/>
-              </a:spcAft>
-              <a:buNone/>
-            </a:pPr>
-            <a:r>
-              <a:rPr lang="en-US" sz="1200" dirty="0">
-                <a:solidFill>
-                  <a:srgbClr val="1C2833"/>
-                </a:solidFill>
-                <a:latin typeface="Arial" pitchFamily="34" charset="0"/>
-                <a:ea typeface="Arial" pitchFamily="34" charset="-122"/>
-                <a:cs typeface="Arial" pitchFamily="34" charset="-120"/>
-              </a:rPr>
-              <a:t>By the end of this lesson, students will record a personal baseline time for adding a 4-addend × 4-digit column using the standard algorithm, and will have seen the dot method solve the same problem visibly faster.</a:t>
-            </a:r>
-            <a:endParaRPr lang="en-US" sz="1200" dirty="0"/>
-          </a:p>
-        </p:txBody>
-      </p:sp>
-      <p:sp>
-        <p:nvSpPr>
-          <p:cNvPr id="7" name="Text 5"/>
-          <p:cNvSpPr/>
-          <p:nvPr/>
-        </p:nvSpPr>
-        <p:spPr>
-          <a:xfrm>
             <a:off x="406301" y="4434929"/>
             <a:ext cx="8498026" cy="213271"/>
           </a:xfrm>
@@ -2518,7 +2778,7 @@
                 <a:ea typeface="Georgia" pitchFamily="34" charset="-122"/>
                 <a:cs typeface="Georgia" pitchFamily="34" charset="-120"/>
               </a:rPr>
-              <a:t>Student-facing content</a:t>
+              <a:t>Teacher demonstration (10 min) (cont.)</a:t>
             </a:r>
             <a:endParaRPr lang="en-US" sz="1800" dirty="0"/>
           </a:p>
@@ -2533,7 +2793,7 @@
         <p:spPr>
           <a:xfrm>
             <a:off x="406301" y="883593"/>
-            <a:ext cx="8331398" cy="2112169"/>
+            <a:ext cx="8331398" cy="1301353"/>
           </a:xfrm>
           <a:prstGeom prst="rect">
             <a:avLst/>
@@ -2562,16 +2822,16 @@
         </p:nvSpPr>
         <p:spPr>
           <a:xfrm>
-            <a:off x="434876" y="883593"/>
-            <a:ext cx="0" cy="2112169"/>
+            <a:off x="430113" y="883593"/>
+            <a:ext cx="0" cy="1301353"/>
           </a:xfrm>
           <a:prstGeom prst="line">
             <a:avLst/>
           </a:prstGeom>
           <a:noFill/>
-          <a:ln w="57150">
+          <a:ln w="47625">
             <a:solidFill>
-              <a:srgbClr val="FE4447"/>
+              <a:srgbClr val="277884"/>
             </a:solidFill>
             <a:prstDash val="solid"/>
           </a:ln>
@@ -2585,8 +2845,8 @@
         </p:nvSpPr>
         <p:spPr>
           <a:xfrm>
-            <a:off x="692051" y="1074093"/>
-            <a:ext cx="7973389" cy="230981"/>
+            <a:off x="631627" y="1010543"/>
+            <a:ext cx="8086939" cy="174575"/>
           </a:xfrm>
           <a:prstGeom prst="rect">
             <a:avLst/>
@@ -2600,7 +2860,259 @@
           <a:p>
             <a:pPr algn="l" indent="0" marL="0">
               <a:lnSpc>
-                <a:spcPts val="1820"/>
+                <a:spcPts val="1375"/>
+              </a:lnSpc>
+              <a:buNone/>
+            </a:pPr>
+            <a:r>
+              <a:rPr lang="en-US" sz="1100" dirty="0">
+                <a:solidFill>
+                  <a:srgbClr val="1C2833"/>
+                </a:solidFill>
+                <a:latin typeface="Courier New" pitchFamily="34" charset="0"/>
+                <a:ea typeface="Courier New" pitchFamily="34" charset="-122"/>
+                <a:cs typeface="Courier New" pitchFamily="34" charset="-120"/>
+              </a:rPr>
+              <a:t>·  ·</a:t>
+            </a:r>
+            <a:endParaRPr lang="en-US" sz="1100" dirty="0"/>
+          </a:p>
+        </p:txBody>
+      </p:sp>
+      <p:sp>
+        <p:nvSpPr>
+          <p:cNvPr id="7" name="Text 5"/>
+          <p:cNvSpPr/>
+          <p:nvPr/>
+        </p:nvSpPr>
+        <p:spPr>
+          <a:xfrm>
+            <a:off x="631627" y="1185118"/>
+            <a:ext cx="8086939" cy="174575"/>
+          </a:xfrm>
+          <a:prstGeom prst="rect">
+            <a:avLst/>
+          </a:prstGeom>
+          <a:noFill/>
+          <a:ln/>
+        </p:spPr>
+        <p:txBody>
+          <a:bodyPr wrap="square" lIns="0" tIns="0" rIns="0" bIns="0" rtlCol="0" anchor="t"/>
+          <a:lstStyle/>
+          <a:p>
+            <a:pPr algn="l" indent="0" marL="0">
+              <a:lnSpc>
+                <a:spcPts val="1375"/>
+              </a:lnSpc>
+              <a:buNone/>
+            </a:pPr>
+            <a:r>
+              <a:rPr lang="en-US" sz="1100" dirty="0">
+                <a:solidFill>
+                  <a:srgbClr val="1C2833"/>
+                </a:solidFill>
+                <a:latin typeface="Courier New" pitchFamily="34" charset="0"/>
+                <a:ea typeface="Courier New" pitchFamily="34" charset="-122"/>
+                <a:cs typeface="Courier New" pitchFamily="34" charset="-120"/>
+              </a:rPr>
+              <a:t>5728</a:t>
+            </a:r>
+            <a:endParaRPr lang="en-US" sz="1100" dirty="0"/>
+          </a:p>
+        </p:txBody>
+      </p:sp>
+      <p:sp>
+        <p:nvSpPr>
+          <p:cNvPr id="8" name="Text 6"/>
+          <p:cNvSpPr/>
+          <p:nvPr/>
+        </p:nvSpPr>
+        <p:spPr>
+          <a:xfrm>
+            <a:off x="631627" y="1359694"/>
+            <a:ext cx="8086939" cy="174575"/>
+          </a:xfrm>
+          <a:prstGeom prst="rect">
+            <a:avLst/>
+          </a:prstGeom>
+          <a:noFill/>
+          <a:ln/>
+        </p:spPr>
+        <p:txBody>
+          <a:bodyPr wrap="square" lIns="0" tIns="0" rIns="0" bIns="0" rtlCol="0" anchor="t"/>
+          <a:lstStyle/>
+          <a:p>
+            <a:pPr algn="l" indent="0" marL="0">
+              <a:lnSpc>
+                <a:spcPts val="1375"/>
+              </a:lnSpc>
+              <a:buNone/>
+            </a:pPr>
+            <a:r>
+              <a:rPr lang="en-US" sz="1100" dirty="0">
+                <a:solidFill>
+                  <a:srgbClr val="1C2833"/>
+                </a:solidFill>
+                <a:latin typeface="Courier New" pitchFamily="34" charset="0"/>
+                <a:ea typeface="Courier New" pitchFamily="34" charset="-122"/>
+                <a:cs typeface="Courier New" pitchFamily="34" charset="-120"/>
+              </a:rPr>
+              <a:t>3417</a:t>
+            </a:r>
+            <a:endParaRPr lang="en-US" sz="1100" dirty="0"/>
+          </a:p>
+        </p:txBody>
+      </p:sp>
+      <p:sp>
+        <p:nvSpPr>
+          <p:cNvPr id="9" name="Text 7"/>
+          <p:cNvSpPr/>
+          <p:nvPr/>
+        </p:nvSpPr>
+        <p:spPr>
+          <a:xfrm>
+            <a:off x="631627" y="1534269"/>
+            <a:ext cx="8086939" cy="174575"/>
+          </a:xfrm>
+          <a:prstGeom prst="rect">
+            <a:avLst/>
+          </a:prstGeom>
+          <a:noFill/>
+          <a:ln/>
+        </p:spPr>
+        <p:txBody>
+          <a:bodyPr wrap="square" lIns="0" tIns="0" rIns="0" bIns="0" rtlCol="0" anchor="t"/>
+          <a:lstStyle/>
+          <a:p>
+            <a:pPr algn="l" indent="0" marL="0">
+              <a:lnSpc>
+                <a:spcPts val="1375"/>
+              </a:lnSpc>
+              <a:buNone/>
+            </a:pPr>
+            <a:r>
+              <a:rPr lang="en-US" sz="1100" dirty="0">
+                <a:solidFill>
+                  <a:srgbClr val="1C2833"/>
+                </a:solidFill>
+                <a:latin typeface="Courier New" pitchFamily="34" charset="0"/>
+                <a:ea typeface="Courier New" pitchFamily="34" charset="-122"/>
+                <a:cs typeface="Courier New" pitchFamily="34" charset="-120"/>
+              </a:rPr>
+              <a:t>6892</a:t>
+            </a:r>
+            <a:endParaRPr lang="en-US" sz="1100" dirty="0"/>
+          </a:p>
+        </p:txBody>
+      </p:sp>
+      <p:sp>
+        <p:nvSpPr>
+          <p:cNvPr id="10" name="Text 8"/>
+          <p:cNvSpPr/>
+          <p:nvPr/>
+        </p:nvSpPr>
+        <p:spPr>
+          <a:xfrm>
+            <a:off x="631627" y="1708845"/>
+            <a:ext cx="8086939" cy="174575"/>
+          </a:xfrm>
+          <a:prstGeom prst="rect">
+            <a:avLst/>
+          </a:prstGeom>
+          <a:noFill/>
+          <a:ln/>
+        </p:spPr>
+        <p:txBody>
+          <a:bodyPr wrap="square" lIns="0" tIns="0" rIns="0" bIns="0" rtlCol="0" anchor="t"/>
+          <a:lstStyle/>
+          <a:p>
+            <a:pPr algn="l" indent="0" marL="0">
+              <a:lnSpc>
+                <a:spcPts val="1375"/>
+              </a:lnSpc>
+              <a:buNone/>
+            </a:pPr>
+            <a:r>
+              <a:rPr lang="en-US" sz="1100" dirty="0">
+                <a:solidFill>
+                  <a:srgbClr val="1C2833"/>
+                </a:solidFill>
+                <a:latin typeface="Courier New" pitchFamily="34" charset="0"/>
+                <a:ea typeface="Courier New" pitchFamily="34" charset="-122"/>
+                <a:cs typeface="Courier New" pitchFamily="34" charset="-120"/>
+              </a:rPr>
+              <a:t>4536+</a:t>
+            </a:r>
+            <a:endParaRPr lang="en-US" sz="1100" dirty="0"/>
+          </a:p>
+        </p:txBody>
+      </p:sp>
+      <p:sp>
+        <p:nvSpPr>
+          <p:cNvPr id="11" name="Text 9"/>
+          <p:cNvSpPr/>
+          <p:nvPr/>
+        </p:nvSpPr>
+        <p:spPr>
+          <a:xfrm>
+            <a:off x="631627" y="1883420"/>
+            <a:ext cx="8086939" cy="174575"/>
+          </a:xfrm>
+          <a:prstGeom prst="rect">
+            <a:avLst/>
+          </a:prstGeom>
+          <a:noFill/>
+          <a:ln/>
+        </p:spPr>
+        <p:txBody>
+          <a:bodyPr wrap="square" lIns="0" tIns="0" rIns="0" bIns="0" rtlCol="0" anchor="t"/>
+          <a:lstStyle/>
+          <a:p>
+            <a:pPr algn="l" indent="0" marL="0">
+              <a:lnSpc>
+                <a:spcPts val="1375"/>
+              </a:lnSpc>
+              <a:buNone/>
+            </a:pPr>
+            <a:r>
+              <a:rPr lang="en-US" sz="1100" dirty="0">
+                <a:solidFill>
+                  <a:srgbClr val="1C2833"/>
+                </a:solidFill>
+                <a:latin typeface="Courier New" pitchFamily="34" charset="0"/>
+                <a:ea typeface="Courier New" pitchFamily="34" charset="-122"/>
+                <a:cs typeface="Courier New" pitchFamily="34" charset="-120"/>
+              </a:rPr>
+              <a:t>3</a:t>
+            </a:r>
+            <a:endParaRPr lang="en-US" sz="1100" dirty="0"/>
+          </a:p>
+        </p:txBody>
+      </p:sp>
+      <p:sp>
+        <p:nvSpPr>
+          <p:cNvPr id="12" name="Text 10"/>
+          <p:cNvSpPr/>
+          <p:nvPr/>
+        </p:nvSpPr>
+        <p:spPr>
+          <a:xfrm>
+            <a:off x="406301" y="2273796"/>
+            <a:ext cx="8498026" cy="213271"/>
+          </a:xfrm>
+          <a:prstGeom prst="rect">
+            <a:avLst/>
+          </a:prstGeom>
+          <a:noFill/>
+          <a:ln/>
+        </p:spPr>
+        <p:txBody>
+          <a:bodyPr wrap="square" lIns="0" tIns="0" rIns="0" bIns="0" rtlCol="0" anchor="t"/>
+          <a:lstStyle/>
+          <a:p>
+            <a:pPr algn="l" indent="0" marL="0">
+              <a:lnSpc>
+                <a:spcPts val="1680"/>
               </a:lnSpc>
               <a:spcBef>
                 <a:spcPts val="300"/>
@@ -2611,328 +3123,23 @@
               <a:buNone/>
             </a:pPr>
             <a:r>
-              <a:rPr lang="en-US" sz="1300" dirty="0">
-                <a:solidFill>
-                  <a:srgbClr val="1C2833"/>
-                </a:solidFill>
-                <a:latin typeface="Georgia" pitchFamily="34" charset="0"/>
-                <a:ea typeface="Georgia" pitchFamily="34" charset="-122"/>
-                <a:cs typeface="Georgia" pitchFamily="34" charset="-120"/>
-              </a:rPr>
-              <a:t>*</a:t>
-            </a:r>
-            <a:pPr algn="l" indent="0" marL="0">
-              <a:lnSpc>
-                <a:spcPts val="1820"/>
-              </a:lnSpc>
-              <a:spcBef>
-                <a:spcPts val="300"/>
-              </a:spcBef>
-              <a:spcAft>
-                <a:spcPts val="300"/>
-              </a:spcAft>
-              <a:buNone/>
-            </a:pPr>
-            <a:r>
-              <a:rPr lang="en-US" sz="1300" i="1" dirty="0">
-                <a:solidFill>
-                  <a:srgbClr val="1C2833"/>
-                </a:solidFill>
-                <a:latin typeface="Georgia" pitchFamily="34" charset="0"/>
-                <a:ea typeface="Georgia" pitchFamily="34" charset="-122"/>
-                <a:cs typeface="Georgia" pitchFamily="34" charset="-120"/>
-              </a:rPr>
-              <a:t>The Dot Method (</a:t>
-            </a:r>
-            <a:pPr algn="l" indent="0" marL="0">
-              <a:lnSpc>
-                <a:spcPts val="1820"/>
-              </a:lnSpc>
-              <a:spcBef>
-                <a:spcPts val="300"/>
-              </a:spcBef>
-              <a:spcAft>
-                <a:spcPts val="300"/>
-              </a:spcAft>
-              <a:buNone/>
-            </a:pPr>
-            <a:r>
-              <a:rPr lang="en-US" sz="1300" dirty="0">
-                <a:solidFill>
-                  <a:srgbClr val="1C2833"/>
-                </a:solidFill>
-                <a:latin typeface="Georgia" pitchFamily="34" charset="0"/>
-                <a:ea typeface="Georgia" pitchFamily="34" charset="-122"/>
-                <a:cs typeface="Georgia" pitchFamily="34" charset="-120"/>
-              </a:rPr>
-              <a:t>Bindu Paddhati</a:t>
-            </a:r>
-            <a:pPr algn="l" indent="0" marL="0">
-              <a:lnSpc>
-                <a:spcPts val="1820"/>
-              </a:lnSpc>
-              <a:spcBef>
-                <a:spcPts val="300"/>
-              </a:spcBef>
-              <a:spcAft>
-                <a:spcPts val="300"/>
-              </a:spcAft>
-              <a:buNone/>
-            </a:pPr>
-            <a:r>
-              <a:rPr lang="en-US" sz="1300" i="1" dirty="0">
-                <a:solidFill>
-                  <a:srgbClr val="1C2833"/>
-                </a:solidFill>
-                <a:latin typeface="Georgia" pitchFamily="34" charset="0"/>
-                <a:ea typeface="Georgia" pitchFamily="34" charset="-122"/>
-                <a:cs typeface="Georgia" pitchFamily="34" charset="-120"/>
-              </a:rPr>
-              <a:t>)</a:t>
-            </a:r>
-            <a:pPr algn="l" indent="0" marL="0">
-              <a:lnSpc>
-                <a:spcPts val="1820"/>
-              </a:lnSpc>
-              <a:spcBef>
-                <a:spcPts val="300"/>
-              </a:spcBef>
-              <a:spcAft>
-                <a:spcPts val="300"/>
-              </a:spcAft>
-              <a:buNone/>
-            </a:pPr>
-            <a:r>
-              <a:rPr lang="en-US" sz="1300" dirty="0">
-                <a:solidFill>
-                  <a:srgbClr val="1C2833"/>
-                </a:solidFill>
-                <a:latin typeface="Georgia" pitchFamily="34" charset="0"/>
-                <a:ea typeface="Georgia" pitchFamily="34" charset="-122"/>
-                <a:cs typeface="Georgia" pitchFamily="34" charset="-120"/>
-              </a:rPr>
-              <a:t>*</a:t>
-            </a:r>
-            <a:endParaRPr lang="en-US" sz="1300" dirty="0"/>
-          </a:p>
-        </p:txBody>
-      </p:sp>
-      <p:sp>
-        <p:nvSpPr>
-          <p:cNvPr id="7" name="Text 5"/>
-          <p:cNvSpPr/>
-          <p:nvPr/>
-        </p:nvSpPr>
-        <p:spPr>
-          <a:xfrm>
-            <a:off x="692051" y="1343174"/>
-            <a:ext cx="7973389" cy="461963"/>
-          </a:xfrm>
-          <a:prstGeom prst="rect">
-            <a:avLst/>
-          </a:prstGeom>
-          <a:noFill/>
-          <a:ln/>
-        </p:spPr>
-        <p:txBody>
-          <a:bodyPr wrap="square" lIns="0" tIns="0" rIns="0" bIns="0" rtlCol="0" anchor="t"/>
-          <a:lstStyle/>
-          <a:p>
-            <a:pPr algn="l" indent="0" marL="0">
-              <a:lnSpc>
-                <a:spcPts val="1820"/>
-              </a:lnSpc>
-              <a:spcBef>
-                <a:spcPts val="300"/>
-              </a:spcBef>
-              <a:spcAft>
-                <a:spcPts val="300"/>
-              </a:spcAft>
-              <a:buNone/>
-            </a:pPr>
-            <a:r>
-              <a:rPr lang="en-US" sz="1300" dirty="0">
-                <a:solidFill>
-                  <a:srgbClr val="1C2833"/>
-                </a:solidFill>
-                <a:latin typeface="Georgia" pitchFamily="34" charset="0"/>
-                <a:ea typeface="Georgia" pitchFamily="34" charset="-122"/>
-                <a:cs typeface="Georgia" pitchFamily="34" charset="-120"/>
-              </a:rPr>
-              <a:t>Instead of adding digits one by one, </a:t>
-            </a:r>
-            <a:pPr algn="l" indent="0" marL="0">
-              <a:lnSpc>
-                <a:spcPts val="1820"/>
-              </a:lnSpc>
-              <a:spcBef>
-                <a:spcPts val="300"/>
-              </a:spcBef>
-              <a:spcAft>
-                <a:spcPts val="300"/>
-              </a:spcAft>
-              <a:buNone/>
-            </a:pPr>
-            <a:r>
-              <a:rPr lang="en-US" sz="1300" b="1" i="1" dirty="0">
-                <a:solidFill>
-                  <a:srgbClr val="1C2833"/>
-                </a:solidFill>
-                <a:latin typeface="Georgia" pitchFamily="34" charset="0"/>
-                <a:ea typeface="Georgia" pitchFamily="34" charset="-122"/>
-                <a:cs typeface="Georgia" pitchFamily="34" charset="-120"/>
-              </a:rPr>
-              <a:t>scan</a:t>
-            </a:r>
-            <a:pPr algn="l" indent="0" marL="0">
-              <a:lnSpc>
-                <a:spcPts val="1820"/>
-              </a:lnSpc>
-              <a:spcBef>
-                <a:spcPts val="300"/>
-              </a:spcBef>
-              <a:spcAft>
-                <a:spcPts val="300"/>
-              </a:spcAft>
-              <a:buNone/>
-            </a:pPr>
-            <a:r>
-              <a:rPr lang="en-US" sz="1300" dirty="0">
-                <a:solidFill>
-                  <a:srgbClr val="1C2833"/>
-                </a:solidFill>
-                <a:latin typeface="Georgia" pitchFamily="34" charset="0"/>
-                <a:ea typeface="Georgia" pitchFamily="34" charset="-122"/>
-                <a:cs typeface="Georgia" pitchFamily="34" charset="-120"/>
-              </a:rPr>
-              <a:t> the column for pairs that make 10. Mark a dot above the digit that "completes" each 10. The number of dots = your carry.</a:t>
-            </a:r>
-            <a:endParaRPr lang="en-US" sz="1300" dirty="0"/>
-          </a:p>
-        </p:txBody>
-      </p:sp>
-      <p:sp>
-        <p:nvSpPr>
-          <p:cNvPr id="8" name="Text 6"/>
-          <p:cNvSpPr/>
-          <p:nvPr/>
-        </p:nvSpPr>
-        <p:spPr>
-          <a:xfrm>
-            <a:off x="692051" y="1843236"/>
-            <a:ext cx="7973389" cy="461963"/>
-          </a:xfrm>
-          <a:prstGeom prst="rect">
-            <a:avLst/>
-          </a:prstGeom>
-          <a:noFill/>
-          <a:ln/>
-        </p:spPr>
-        <p:txBody>
-          <a:bodyPr wrap="square" lIns="0" tIns="0" rIns="0" bIns="0" rtlCol="0" anchor="t"/>
-          <a:lstStyle/>
-          <a:p>
-            <a:pPr algn="l" indent="0" marL="0">
-              <a:lnSpc>
-                <a:spcPts val="1820"/>
-              </a:lnSpc>
-              <a:spcBef>
-                <a:spcPts val="300"/>
-              </a:spcBef>
-              <a:spcAft>
-                <a:spcPts val="300"/>
-              </a:spcAft>
-              <a:buNone/>
-            </a:pPr>
-            <a:r>
-              <a:rPr lang="en-US" sz="1300" b="1" i="1" dirty="0">
-                <a:solidFill>
-                  <a:srgbClr val="1C2833"/>
-                </a:solidFill>
-                <a:latin typeface="Georgia" pitchFamily="34" charset="0"/>
-                <a:ea typeface="Georgia" pitchFamily="34" charset="-122"/>
-                <a:cs typeface="Georgia" pitchFamily="34" charset="-120"/>
-              </a:rPr>
-              <a:t>Why?</a:t>
-            </a:r>
-            <a:pPr algn="l" indent="0" marL="0">
-              <a:lnSpc>
-                <a:spcPts val="1820"/>
-              </a:lnSpc>
-              <a:spcBef>
-                <a:spcPts val="300"/>
-              </a:spcBef>
-              <a:spcAft>
-                <a:spcPts val="300"/>
-              </a:spcAft>
-              <a:buNone/>
-            </a:pPr>
-            <a:r>
-              <a:rPr lang="en-US" sz="1300" dirty="0">
-                <a:solidFill>
-                  <a:srgbClr val="1C2833"/>
-                </a:solidFill>
-                <a:latin typeface="Georgia" pitchFamily="34" charset="0"/>
-                <a:ea typeface="Georgia" pitchFamily="34" charset="-122"/>
-                <a:cs typeface="Georgia" pitchFamily="34" charset="-120"/>
-              </a:rPr>
-              <a:t> Adding 10 is easy. Adding 9 to 4 to 7 to 6 takes thought. If you can group into 10s first, you only count the leftover and the dots.</a:t>
-            </a:r>
-            <a:endParaRPr lang="en-US" sz="1300" dirty="0"/>
-          </a:p>
-        </p:txBody>
-      </p:sp>
-      <p:sp>
-        <p:nvSpPr>
-          <p:cNvPr id="9" name="Text 7"/>
-          <p:cNvSpPr/>
-          <p:nvPr/>
-        </p:nvSpPr>
-        <p:spPr>
-          <a:xfrm>
-            <a:off x="692051" y="2343299"/>
-            <a:ext cx="7973389" cy="461963"/>
-          </a:xfrm>
-          <a:prstGeom prst="rect">
-            <a:avLst/>
-          </a:prstGeom>
-          <a:noFill/>
-          <a:ln/>
-        </p:spPr>
-        <p:txBody>
-          <a:bodyPr wrap="square" lIns="0" tIns="0" rIns="0" bIns="0" rtlCol="0" anchor="t"/>
-          <a:lstStyle/>
-          <a:p>
-            <a:pPr algn="l" indent="0" marL="0">
-              <a:lnSpc>
-                <a:spcPts val="1820"/>
-              </a:lnSpc>
-              <a:spcBef>
-                <a:spcPts val="300"/>
-              </a:spcBef>
-              <a:spcAft>
-                <a:spcPts val="300"/>
-              </a:spcAft>
-              <a:buNone/>
-            </a:pPr>
-            <a:r>
-              <a:rPr lang="en-US" sz="1300" i="1" dirty="0">
-                <a:solidFill>
-                  <a:srgbClr val="1C2833"/>
-                </a:solidFill>
-                <a:latin typeface="Georgia" pitchFamily="34" charset="0"/>
-                <a:ea typeface="Georgia" pitchFamily="34" charset="-122"/>
-                <a:cs typeface="Georgia" pitchFamily="34" charset="-120"/>
-              </a:rPr>
-              <a:t>Today's baseline: my time using my normal method = ____ seconds. My time using dot method (first try) = ____ seconds. I expect this gap to shrink by Day 5.</a:t>
-            </a:r>
-            <a:endParaRPr lang="en-US" sz="1300" dirty="0"/>
-          </a:p>
-        </p:txBody>
-      </p:sp>
-      <p:sp>
-        <p:nvSpPr>
-          <p:cNvPr id="10" name="Text 8"/>
+              <a:rPr lang="en-US" sz="1200" dirty="0">
+                <a:solidFill>
+                  <a:srgbClr val="1C2833"/>
+                </a:solidFill>
+                <a:latin typeface="Arial" pitchFamily="34" charset="0"/>
+                <a:ea typeface="Arial" pitchFamily="34" charset="-122"/>
+                <a:cs typeface="Arial" pitchFamily="34" charset="-120"/>
+              </a:rPr>
+              <a:t>Continue for tens, hundreds, thousands columns. Reveal answer.</a:t>
+            </a:r>
+            <a:endParaRPr lang="en-US" sz="1200" dirty="0"/>
+          </a:p>
+        </p:txBody>
+      </p:sp>
+      <p:sp>
+        <p:nvSpPr>
+          <p:cNvPr id="13" name="Text 11"/>
           <p:cNvSpPr/>
           <p:nvPr/>
         </p:nvSpPr>
@@ -3082,7 +3289,7 @@
                 <a:ea typeface="Georgia" pitchFamily="34" charset="-122"/>
                 <a:cs typeface="Georgia" pitchFamily="34" charset="-120"/>
               </a:rPr>
-              <a:t>Homework</a:t>
+              <a:t>Teacher demonstration (10 min) (cont.)</a:t>
             </a:r>
             <a:endParaRPr lang="en-US" sz="1800" dirty="0"/>
           </a:p>
@@ -3096,8 +3303,8 @@
         </p:nvSpPr>
         <p:spPr>
           <a:xfrm>
-            <a:off x="406301" y="870942"/>
-            <a:ext cx="8498026" cy="426541"/>
+            <a:off x="634901" y="883593"/>
+            <a:ext cx="8102798" cy="281880"/>
           </a:xfrm>
           <a:prstGeom prst="rect">
             <a:avLst/>
@@ -3109,20 +3316,18 @@
           <a:bodyPr wrap="square" lIns="0" tIns="0" rIns="0" bIns="0" rtlCol="0" anchor="t"/>
           <a:lstStyle/>
           <a:p>
-            <a:pPr algn="l" indent="0" marL="0">
-              <a:lnSpc>
-                <a:spcPts val="1680"/>
-              </a:lnSpc>
-              <a:spcBef>
-                <a:spcPts val="300"/>
-              </a:spcBef>
-              <a:spcAft>
-                <a:spcPts val="300"/>
-              </a:spcAft>
-              <a:buNone/>
-            </a:pPr>
-            <a:r>
-              <a:rPr lang="en-US" sz="1200" dirty="0">
+            <a:pPr algn="l" marL="342900" indent="-342900">
+              <a:lnSpc>
+                <a:spcPts val="1620"/>
+              </a:lnSpc>
+              <a:spcAft>
+                <a:spcPts val="300"/>
+              </a:spcAft>
+              <a:buSzPct val="100000"/>
+              <a:buChar char="•"/>
+            </a:pPr>
+            <a:r>
+              <a:rPr lang="en-US" sz="1200" i="1" dirty="0">
                 <a:solidFill>
                   <a:srgbClr val="1C2833"/>
                 </a:solidFill>
@@ -3130,7 +3335,47 @@
                 <a:ea typeface="Arial" pitchFamily="34" charset="-122"/>
                 <a:cs typeface="Arial" pitchFamily="34" charset="-120"/>
               </a:rPr>
-              <a:t>– Practice the "make 10" reflex: 10 quick pairs. 8+? = 10. 3+? = 10. 6+? = 10. 4+? = 10. 9+? = 10. 1+? = 10. 7+? = 10. 5+? = 10. 2+? = 10. 0+? = 10. – Do all 10 in under 15 seconds.</a:t>
+              <a:t>"Notice: I never stopped to think 'what's 8 + 7 + 2 + 6?' I just</a:t>
+            </a:r>
+            <a:pPr algn="l" indent="0" marL="0">
+              <a:lnSpc>
+                <a:spcPts val="1620"/>
+              </a:lnSpc>
+              <a:spcAft>
+                <a:spcPts val="300"/>
+              </a:spcAft>
+              <a:buNone/>
+            </a:pPr>
+            <a:r>
+              <a:rPr lang="en-US" sz="1200" dirty="0">
+                <a:solidFill>
+                  <a:srgbClr val="1C2833"/>
+                </a:solidFill>
+                <a:latin typeface="Arial" pitchFamily="34" charset="0"/>
+                <a:ea typeface="Arial" pitchFamily="34" charset="-122"/>
+                <a:cs typeface="Arial" pitchFamily="34" charset="-120"/>
+              </a:rPr>
+              <a:t>scanned</a:t>
+            </a:r>
+            <a:pPr algn="l" indent="0" marL="0">
+              <a:lnSpc>
+                <a:spcPts val="1620"/>
+              </a:lnSpc>
+              <a:spcAft>
+                <a:spcPts val="300"/>
+              </a:spcAft>
+              <a:buNone/>
+            </a:pPr>
+            <a:r>
+              <a:rPr lang="en-US" sz="1200" i="1" dirty="0">
+                <a:solidFill>
+                  <a:srgbClr val="1C2833"/>
+                </a:solidFill>
+                <a:latin typeface="Arial" pitchFamily="34" charset="0"/>
+                <a:ea typeface="Arial" pitchFamily="34" charset="-122"/>
+                <a:cs typeface="Arial" pitchFamily="34" charset="-120"/>
+              </a:rPr>
+              <a:t> for pairs that make 10."</a:t>
             </a:r>
             <a:endParaRPr lang="en-US" sz="1200" dirty="0"/>
           </a:p>
@@ -3288,7 +3533,7 @@
                 <a:ea typeface="Georgia" pitchFamily="34" charset="-122"/>
                 <a:cs typeface="Georgia" pitchFamily="34" charset="-120"/>
               </a:rPr>
-              <a:t>Differentiation</a:t>
+              <a:t>Activity (15 min) — First try</a:t>
             </a:r>
             <a:endParaRPr lang="en-US" sz="1800" dirty="0"/>
           </a:p>
@@ -3303,7 +3548,7 @@
         <p:spPr>
           <a:xfrm>
             <a:off x="634901" y="883593"/>
-            <a:ext cx="8102798" cy="525661"/>
+            <a:ext cx="8102798" cy="769441"/>
           </a:xfrm>
           <a:prstGeom prst="rect">
             <a:avLst/>
@@ -3326,7 +3571,7 @@
               <a:buChar char="•"/>
             </a:pPr>
             <a:r>
-              <a:rPr lang="en-US" sz="1200" b="1" dirty="0">
+              <a:rPr lang="en-US" sz="1200" dirty="0">
                 <a:solidFill>
                   <a:srgbClr val="1C2833"/>
                 </a:solidFill>
@@ -3334,7 +3579,7 @@
                 <a:ea typeface="Arial" pitchFamily="34" charset="-122"/>
                 <a:cs typeface="Arial" pitchFamily="34" charset="-120"/>
               </a:rPr>
-              <a:t>Tier up:</a:t>
+              <a:t>Students re-do the same problem using the dot method on the </a:t>
             </a:r>
             <a:pPr algn="l" indent="0" marL="0">
               <a:lnSpc>
@@ -3346,7 +3591,7 @@
               <a:buNone/>
             </a:pPr>
             <a:r>
-              <a:rPr lang="en-US" sz="1200" dirty="0">
+              <a:rPr lang="en-US" sz="1200" i="1" dirty="0">
                 <a:solidFill>
                   <a:srgbClr val="1C2833"/>
                 </a:solidFill>
@@ -3354,23 +3599,19 @@
                 <a:ea typeface="Arial" pitchFamily="34" charset="-122"/>
                 <a:cs typeface="Arial" pitchFamily="34" charset="-120"/>
               </a:rPr>
-              <a:t> Try the dot method on a 5-addend × 5-digit problem. Time it.</a:t>
-            </a:r>
-            <a:endParaRPr lang="en-US" sz="1200" dirty="0"/>
-          </a:p>
-          <a:p>
-            <a:pPr algn="l" marL="342900" indent="-342900">
+              <a:t>back</a:t>
+            </a:r>
+            <a:pPr algn="l" indent="0" marL="0">
               <a:lnSpc>
                 <a:spcPts val="1620"/>
               </a:lnSpc>
               <a:spcAft>
                 <a:spcPts val="300"/>
               </a:spcAft>
-              <a:buSzPct val="100000"/>
-              <a:buChar char="•"/>
-            </a:pPr>
-            <a:r>
-              <a:rPr lang="en-US" sz="1200" b="1" dirty="0">
+              <a:buNone/>
+            </a:pPr>
+            <a:r>
+              <a:rPr lang="en-US" sz="1200" dirty="0">
                 <a:solidFill>
                   <a:srgbClr val="1C2833"/>
                 </a:solidFill>
@@ -3378,16 +3619,20 @@
                 <a:ea typeface="Arial" pitchFamily="34" charset="-122"/>
                 <a:cs typeface="Arial" pitchFamily="34" charset="-120"/>
               </a:rPr>
-              <a:t>Tier down:</a:t>
-            </a:r>
-            <a:pPr algn="l" indent="0" marL="0">
+              <a:t> of their baseline sheet.</a:t>
+            </a:r>
+            <a:endParaRPr lang="en-US" sz="1200" dirty="0"/>
+          </a:p>
+          <a:p>
+            <a:pPr algn="l" marL="342900" indent="-342900">
               <a:lnSpc>
                 <a:spcPts val="1620"/>
               </a:lnSpc>
               <a:spcAft>
                 <a:spcPts val="300"/>
               </a:spcAft>
-              <a:buNone/>
+              <a:buSzPct val="100000"/>
+              <a:buChar char="•"/>
             </a:pPr>
             <a:r>
               <a:rPr lang="en-US" sz="1200" dirty="0">
@@ -3398,7 +3643,31 @@
                 <a:ea typeface="Arial" pitchFamily="34" charset="-122"/>
                 <a:cs typeface="Arial" pitchFamily="34" charset="-120"/>
               </a:rPr>
-              <a:t> If 4-digit columns are too hard, drop to 3-addend × 3-digit for today. We'll scale up.</a:t>
+              <a:t>Time themselves again.</a:t>
+            </a:r>
+            <a:endParaRPr lang="en-US" sz="1200" dirty="0"/>
+          </a:p>
+          <a:p>
+            <a:pPr algn="l" marL="342900" indent="-342900">
+              <a:lnSpc>
+                <a:spcPts val="1620"/>
+              </a:lnSpc>
+              <a:spcAft>
+                <a:spcPts val="300"/>
+              </a:spcAft>
+              <a:buSzPct val="100000"/>
+              <a:buChar char="•"/>
+            </a:pPr>
+            <a:r>
+              <a:rPr lang="en-US" sz="1200" dirty="0">
+                <a:solidFill>
+                  <a:srgbClr val="1C2833"/>
+                </a:solidFill>
+                <a:latin typeface="Arial" pitchFamily="34" charset="0"/>
+                <a:ea typeface="Arial" pitchFamily="34" charset="-122"/>
+                <a:cs typeface="Arial" pitchFamily="34" charset="-120"/>
+              </a:rPr>
+              <a:t>Compare: how much slower (or faster) was the dot method on the FIRST try?</a:t>
             </a:r>
             <a:endParaRPr lang="en-US" sz="1200" dirty="0"/>
           </a:p>
@@ -3556,7 +3825,7 @@
                 <a:ea typeface="Georgia" pitchFamily="34" charset="-122"/>
                 <a:cs typeface="Georgia" pitchFamily="34" charset="-120"/>
               </a:rPr>
-              <a:t>Teacher notes</a:t>
+              <a:t>Wrap-up (5 min)</a:t>
             </a:r>
             <a:endParaRPr lang="en-US" sz="1800" dirty="0"/>
           </a:p>
@@ -3570,8 +3839,8 @@
         </p:nvSpPr>
         <p:spPr>
           <a:xfrm>
-            <a:off x="406301" y="870942"/>
-            <a:ext cx="8498026" cy="639812"/>
+            <a:off x="634901" y="883593"/>
+            <a:ext cx="8102798" cy="731341"/>
           </a:xfrm>
           <a:prstGeom prst="rect">
             <a:avLst/>
@@ -3583,17 +3852,15 @@
           <a:bodyPr wrap="square" lIns="0" tIns="0" rIns="0" bIns="0" rtlCol="0" anchor="t"/>
           <a:lstStyle/>
           <a:p>
-            <a:pPr algn="l" indent="0" marL="0">
-              <a:lnSpc>
-                <a:spcPts val="1680"/>
-              </a:lnSpc>
-              <a:spcBef>
-                <a:spcPts val="300"/>
-              </a:spcBef>
-              <a:spcAft>
-                <a:spcPts val="300"/>
-              </a:spcAft>
-              <a:buNone/>
+            <a:pPr algn="l" marL="342900" indent="-342900">
+              <a:lnSpc>
+                <a:spcPts val="1620"/>
+              </a:lnSpc>
+              <a:spcAft>
+                <a:spcPts val="300"/>
+              </a:spcAft>
+              <a:buSzPct val="100000"/>
+              <a:buChar char="•"/>
             </a:pPr>
             <a:r>
               <a:rPr lang="en-US" sz="1200" dirty="0">
@@ -3604,22 +3871,23 @@
                 <a:ea typeface="Arial" pitchFamily="34" charset="-122"/>
                 <a:cs typeface="Arial" pitchFamily="34" charset="-120"/>
               </a:rPr>
-              <a:t>– The baseline time is the </a:t>
-            </a:r>
-            <a:pPr algn="l" indent="0" marL="0">
-              <a:lnSpc>
-                <a:spcPts val="1680"/>
-              </a:lnSpc>
-              <a:spcBef>
-                <a:spcPts val="300"/>
-              </a:spcBef>
-              <a:spcAft>
-                <a:spcPts val="300"/>
-              </a:spcAft>
-              <a:buNone/>
-            </a:pPr>
-            <a:r>
-              <a:rPr lang="en-US" sz="1200" i="1" dirty="0">
+              <a:t>Show of hands: who was faster with the dot method on first try? Who was slower? (Most will be slower — that's expected. The speedup comes after 3–4 days of practice.)</a:t>
+            </a:r>
+            <a:endParaRPr lang="en-US" sz="1200" dirty="0"/>
+          </a:p>
+          <a:p>
+            <a:pPr algn="l" marL="342900" indent="-342900">
+              <a:lnSpc>
+                <a:spcPts val="1620"/>
+              </a:lnSpc>
+              <a:spcAft>
+                <a:spcPts val="300"/>
+              </a:spcAft>
+              <a:buSzPct val="100000"/>
+              <a:buChar char="•"/>
+            </a:pPr>
+            <a:r>
+              <a:rPr lang="en-US" sz="1200" dirty="0">
                 <a:solidFill>
                   <a:srgbClr val="1C2833"/>
                 </a:solidFill>
@@ -3627,30 +3895,7 @@
                 <a:ea typeface="Arial" pitchFamily="34" charset="-122"/>
                 <a:cs typeface="Arial" pitchFamily="34" charset="-120"/>
               </a:rPr>
-              <a:t>single most important</a:t>
-            </a:r>
-            <a:pPr algn="l" indent="0" marL="0">
-              <a:lnSpc>
-                <a:spcPts val="1680"/>
-              </a:lnSpc>
-              <a:spcBef>
-                <a:spcPts val="300"/>
-              </a:spcBef>
-              <a:spcAft>
-                <a:spcPts val="300"/>
-              </a:spcAft>
-              <a:buNone/>
-            </a:pPr>
-            <a:r>
-              <a:rPr lang="en-US" sz="1200" dirty="0">
-                <a:solidFill>
-                  <a:srgbClr val="1C2833"/>
-                </a:solidFill>
-                <a:latin typeface="Arial" pitchFamily="34" charset="0"/>
-                <a:ea typeface="Arial" pitchFamily="34" charset="-122"/>
-                <a:cs typeface="Arial" pitchFamily="34" charset="-120"/>
-              </a:rPr>
-              <a:t> artefact of Day 1. Make sure every student records it honestly. Day 5's retest depends on it. – Don't promise a specific speedup — say "you'll likely be faster by Day 5; how much depends on you." – Walk around during the demo and notice who looks confused. Pull them aside in the wrap-up minute.</a:t>
+              <a:t>Preview Day 2: "Tomorrow we'll work on the foundational skill — instantly seeing pairs that make 10."</a:t>
             </a:r>
             <a:endParaRPr lang="en-US" sz="1200" dirty="0"/>
           </a:p>
@@ -3808,6 +4053,1358 @@
                 <a:ea typeface="Georgia" pitchFamily="34" charset="-122"/>
                 <a:cs typeface="Georgia" pitchFamily="34" charset="-120"/>
               </a:rPr>
+              <a:t>Student-facing content</a:t>
+            </a:r>
+            <a:endParaRPr lang="en-US" sz="1800" dirty="0"/>
+          </a:p>
+        </p:txBody>
+      </p:sp>
+      <p:sp>
+        <p:nvSpPr>
+          <p:cNvPr id="4" name="Text 2"/>
+          <p:cNvSpPr/>
+          <p:nvPr/>
+        </p:nvSpPr>
+        <p:spPr>
+          <a:xfrm>
+            <a:off x="406301" y="883593"/>
+            <a:ext cx="8331398" cy="2112169"/>
+          </a:xfrm>
+          <a:prstGeom prst="rect">
+            <a:avLst/>
+          </a:prstGeom>
+          <a:solidFill>
+            <a:srgbClr val="F4F8F9"/>
+          </a:solidFill>
+          <a:ln/>
+        </p:spPr>
+        <p:txBody>
+          <a:bodyPr wrap="square" rtlCol="0" anchor="ctr"/>
+          <a:lstStyle/>
+          <a:p>
+            <a:pPr indent="0" marL="0">
+              <a:buNone/>
+            </a:pPr>
+            <a:endParaRPr lang="en-US" dirty="0"/>
+          </a:p>
+        </p:txBody>
+      </p:sp>
+      <p:sp>
+        <p:nvSpPr>
+          <p:cNvPr id="5" name="Shape 3"/>
+          <p:cNvSpPr/>
+          <p:nvPr/>
+        </p:nvSpPr>
+        <p:spPr>
+          <a:xfrm>
+            <a:off x="434876" y="883593"/>
+            <a:ext cx="0" cy="2112169"/>
+          </a:xfrm>
+          <a:prstGeom prst="line">
+            <a:avLst/>
+          </a:prstGeom>
+          <a:noFill/>
+          <a:ln w="57150">
+            <a:solidFill>
+              <a:srgbClr val="FE4447"/>
+            </a:solidFill>
+            <a:prstDash val="solid"/>
+          </a:ln>
+        </p:spPr>
+      </p:sp>
+      <p:sp>
+        <p:nvSpPr>
+          <p:cNvPr id="6" name="Text 4"/>
+          <p:cNvSpPr/>
+          <p:nvPr/>
+        </p:nvSpPr>
+        <p:spPr>
+          <a:xfrm>
+            <a:off x="692051" y="1074093"/>
+            <a:ext cx="7973389" cy="230981"/>
+          </a:xfrm>
+          <a:prstGeom prst="rect">
+            <a:avLst/>
+          </a:prstGeom>
+          <a:noFill/>
+          <a:ln/>
+        </p:spPr>
+        <p:txBody>
+          <a:bodyPr wrap="square" lIns="0" tIns="0" rIns="0" bIns="0" rtlCol="0" anchor="t"/>
+          <a:lstStyle/>
+          <a:p>
+            <a:pPr algn="l" indent="0" marL="0">
+              <a:lnSpc>
+                <a:spcPts val="1820"/>
+              </a:lnSpc>
+              <a:spcBef>
+                <a:spcPts val="300"/>
+              </a:spcBef>
+              <a:spcAft>
+                <a:spcPts val="300"/>
+              </a:spcAft>
+              <a:buNone/>
+            </a:pPr>
+            <a:r>
+              <a:rPr lang="en-US" sz="1300" dirty="0">
+                <a:solidFill>
+                  <a:srgbClr val="1C2833"/>
+                </a:solidFill>
+                <a:latin typeface="Georgia" pitchFamily="34" charset="0"/>
+                <a:ea typeface="Georgia" pitchFamily="34" charset="-122"/>
+                <a:cs typeface="Georgia" pitchFamily="34" charset="-120"/>
+              </a:rPr>
+              <a:t>*</a:t>
+            </a:r>
+            <a:pPr algn="l" indent="0" marL="0">
+              <a:lnSpc>
+                <a:spcPts val="1820"/>
+              </a:lnSpc>
+              <a:spcBef>
+                <a:spcPts val="300"/>
+              </a:spcBef>
+              <a:spcAft>
+                <a:spcPts val="300"/>
+              </a:spcAft>
+              <a:buNone/>
+            </a:pPr>
+            <a:r>
+              <a:rPr lang="en-US" sz="1300" i="1" dirty="0">
+                <a:solidFill>
+                  <a:srgbClr val="1C2833"/>
+                </a:solidFill>
+                <a:latin typeface="Georgia" pitchFamily="34" charset="0"/>
+                <a:ea typeface="Georgia" pitchFamily="34" charset="-122"/>
+                <a:cs typeface="Georgia" pitchFamily="34" charset="-120"/>
+              </a:rPr>
+              <a:t>The Dot Method (</a:t>
+            </a:r>
+            <a:pPr algn="l" indent="0" marL="0">
+              <a:lnSpc>
+                <a:spcPts val="1820"/>
+              </a:lnSpc>
+              <a:spcBef>
+                <a:spcPts val="300"/>
+              </a:spcBef>
+              <a:spcAft>
+                <a:spcPts val="300"/>
+              </a:spcAft>
+              <a:buNone/>
+            </a:pPr>
+            <a:r>
+              <a:rPr lang="en-US" sz="1300" dirty="0">
+                <a:solidFill>
+                  <a:srgbClr val="1C2833"/>
+                </a:solidFill>
+                <a:latin typeface="Georgia" pitchFamily="34" charset="0"/>
+                <a:ea typeface="Georgia" pitchFamily="34" charset="-122"/>
+                <a:cs typeface="Georgia" pitchFamily="34" charset="-120"/>
+              </a:rPr>
+              <a:t>Bindu Paddhati</a:t>
+            </a:r>
+            <a:pPr algn="l" indent="0" marL="0">
+              <a:lnSpc>
+                <a:spcPts val="1820"/>
+              </a:lnSpc>
+              <a:spcBef>
+                <a:spcPts val="300"/>
+              </a:spcBef>
+              <a:spcAft>
+                <a:spcPts val="300"/>
+              </a:spcAft>
+              <a:buNone/>
+            </a:pPr>
+            <a:r>
+              <a:rPr lang="en-US" sz="1300" i="1" dirty="0">
+                <a:solidFill>
+                  <a:srgbClr val="1C2833"/>
+                </a:solidFill>
+                <a:latin typeface="Georgia" pitchFamily="34" charset="0"/>
+                <a:ea typeface="Georgia" pitchFamily="34" charset="-122"/>
+                <a:cs typeface="Georgia" pitchFamily="34" charset="-120"/>
+              </a:rPr>
+              <a:t>)</a:t>
+            </a:r>
+            <a:pPr algn="l" indent="0" marL="0">
+              <a:lnSpc>
+                <a:spcPts val="1820"/>
+              </a:lnSpc>
+              <a:spcBef>
+                <a:spcPts val="300"/>
+              </a:spcBef>
+              <a:spcAft>
+                <a:spcPts val="300"/>
+              </a:spcAft>
+              <a:buNone/>
+            </a:pPr>
+            <a:r>
+              <a:rPr lang="en-US" sz="1300" dirty="0">
+                <a:solidFill>
+                  <a:srgbClr val="1C2833"/>
+                </a:solidFill>
+                <a:latin typeface="Georgia" pitchFamily="34" charset="0"/>
+                <a:ea typeface="Georgia" pitchFamily="34" charset="-122"/>
+                <a:cs typeface="Georgia" pitchFamily="34" charset="-120"/>
+              </a:rPr>
+              <a:t>*</a:t>
+            </a:r>
+            <a:endParaRPr lang="en-US" sz="1300" dirty="0"/>
+          </a:p>
+        </p:txBody>
+      </p:sp>
+      <p:sp>
+        <p:nvSpPr>
+          <p:cNvPr id="7" name="Text 5"/>
+          <p:cNvSpPr/>
+          <p:nvPr/>
+        </p:nvSpPr>
+        <p:spPr>
+          <a:xfrm>
+            <a:off x="692051" y="1343174"/>
+            <a:ext cx="7973389" cy="461963"/>
+          </a:xfrm>
+          <a:prstGeom prst="rect">
+            <a:avLst/>
+          </a:prstGeom>
+          <a:noFill/>
+          <a:ln/>
+        </p:spPr>
+        <p:txBody>
+          <a:bodyPr wrap="square" lIns="0" tIns="0" rIns="0" bIns="0" rtlCol="0" anchor="t"/>
+          <a:lstStyle/>
+          <a:p>
+            <a:pPr algn="l" indent="0" marL="0">
+              <a:lnSpc>
+                <a:spcPts val="1820"/>
+              </a:lnSpc>
+              <a:spcBef>
+                <a:spcPts val="300"/>
+              </a:spcBef>
+              <a:spcAft>
+                <a:spcPts val="300"/>
+              </a:spcAft>
+              <a:buNone/>
+            </a:pPr>
+            <a:r>
+              <a:rPr lang="en-US" sz="1300" dirty="0">
+                <a:solidFill>
+                  <a:srgbClr val="1C2833"/>
+                </a:solidFill>
+                <a:latin typeface="Georgia" pitchFamily="34" charset="0"/>
+                <a:ea typeface="Georgia" pitchFamily="34" charset="-122"/>
+                <a:cs typeface="Georgia" pitchFamily="34" charset="-120"/>
+              </a:rPr>
+              <a:t>Instead of adding digits one by one, </a:t>
+            </a:r>
+            <a:pPr algn="l" indent="0" marL="0">
+              <a:lnSpc>
+                <a:spcPts val="1820"/>
+              </a:lnSpc>
+              <a:spcBef>
+                <a:spcPts val="300"/>
+              </a:spcBef>
+              <a:spcAft>
+                <a:spcPts val="300"/>
+              </a:spcAft>
+              <a:buNone/>
+            </a:pPr>
+            <a:r>
+              <a:rPr lang="en-US" sz="1300" b="1" i="1" dirty="0">
+                <a:solidFill>
+                  <a:srgbClr val="1C2833"/>
+                </a:solidFill>
+                <a:latin typeface="Georgia" pitchFamily="34" charset="0"/>
+                <a:ea typeface="Georgia" pitchFamily="34" charset="-122"/>
+                <a:cs typeface="Georgia" pitchFamily="34" charset="-120"/>
+              </a:rPr>
+              <a:t>scan</a:t>
+            </a:r>
+            <a:pPr algn="l" indent="0" marL="0">
+              <a:lnSpc>
+                <a:spcPts val="1820"/>
+              </a:lnSpc>
+              <a:spcBef>
+                <a:spcPts val="300"/>
+              </a:spcBef>
+              <a:spcAft>
+                <a:spcPts val="300"/>
+              </a:spcAft>
+              <a:buNone/>
+            </a:pPr>
+            <a:r>
+              <a:rPr lang="en-US" sz="1300" dirty="0">
+                <a:solidFill>
+                  <a:srgbClr val="1C2833"/>
+                </a:solidFill>
+                <a:latin typeface="Georgia" pitchFamily="34" charset="0"/>
+                <a:ea typeface="Georgia" pitchFamily="34" charset="-122"/>
+                <a:cs typeface="Georgia" pitchFamily="34" charset="-120"/>
+              </a:rPr>
+              <a:t> the column for pairs that make 10. Mark a dot above the digit that "completes" each 10. The number of dots = your carry.</a:t>
+            </a:r>
+            <a:endParaRPr lang="en-US" sz="1300" dirty="0"/>
+          </a:p>
+        </p:txBody>
+      </p:sp>
+      <p:sp>
+        <p:nvSpPr>
+          <p:cNvPr id="8" name="Text 6"/>
+          <p:cNvSpPr/>
+          <p:nvPr/>
+        </p:nvSpPr>
+        <p:spPr>
+          <a:xfrm>
+            <a:off x="692051" y="1843236"/>
+            <a:ext cx="7973389" cy="461963"/>
+          </a:xfrm>
+          <a:prstGeom prst="rect">
+            <a:avLst/>
+          </a:prstGeom>
+          <a:noFill/>
+          <a:ln/>
+        </p:spPr>
+        <p:txBody>
+          <a:bodyPr wrap="square" lIns="0" tIns="0" rIns="0" bIns="0" rtlCol="0" anchor="t"/>
+          <a:lstStyle/>
+          <a:p>
+            <a:pPr algn="l" indent="0" marL="0">
+              <a:lnSpc>
+                <a:spcPts val="1820"/>
+              </a:lnSpc>
+              <a:spcBef>
+                <a:spcPts val="300"/>
+              </a:spcBef>
+              <a:spcAft>
+                <a:spcPts val="300"/>
+              </a:spcAft>
+              <a:buNone/>
+            </a:pPr>
+            <a:r>
+              <a:rPr lang="en-US" sz="1300" b="1" i="1" dirty="0">
+                <a:solidFill>
+                  <a:srgbClr val="1C2833"/>
+                </a:solidFill>
+                <a:latin typeface="Georgia" pitchFamily="34" charset="0"/>
+                <a:ea typeface="Georgia" pitchFamily="34" charset="-122"/>
+                <a:cs typeface="Georgia" pitchFamily="34" charset="-120"/>
+              </a:rPr>
+              <a:t>Why?</a:t>
+            </a:r>
+            <a:pPr algn="l" indent="0" marL="0">
+              <a:lnSpc>
+                <a:spcPts val="1820"/>
+              </a:lnSpc>
+              <a:spcBef>
+                <a:spcPts val="300"/>
+              </a:spcBef>
+              <a:spcAft>
+                <a:spcPts val="300"/>
+              </a:spcAft>
+              <a:buNone/>
+            </a:pPr>
+            <a:r>
+              <a:rPr lang="en-US" sz="1300" dirty="0">
+                <a:solidFill>
+                  <a:srgbClr val="1C2833"/>
+                </a:solidFill>
+                <a:latin typeface="Georgia" pitchFamily="34" charset="0"/>
+                <a:ea typeface="Georgia" pitchFamily="34" charset="-122"/>
+                <a:cs typeface="Georgia" pitchFamily="34" charset="-120"/>
+              </a:rPr>
+              <a:t> Adding 10 is easy. Adding 9 to 4 to 7 to 6 takes thought. If you can group into 10s first, you only count the leftover and the dots.</a:t>
+            </a:r>
+            <a:endParaRPr lang="en-US" sz="1300" dirty="0"/>
+          </a:p>
+        </p:txBody>
+      </p:sp>
+      <p:sp>
+        <p:nvSpPr>
+          <p:cNvPr id="9" name="Text 7"/>
+          <p:cNvSpPr/>
+          <p:nvPr/>
+        </p:nvSpPr>
+        <p:spPr>
+          <a:xfrm>
+            <a:off x="692051" y="2343299"/>
+            <a:ext cx="7973389" cy="461963"/>
+          </a:xfrm>
+          <a:prstGeom prst="rect">
+            <a:avLst/>
+          </a:prstGeom>
+          <a:noFill/>
+          <a:ln/>
+        </p:spPr>
+        <p:txBody>
+          <a:bodyPr wrap="square" lIns="0" tIns="0" rIns="0" bIns="0" rtlCol="0" anchor="t"/>
+          <a:lstStyle/>
+          <a:p>
+            <a:pPr algn="l" indent="0" marL="0">
+              <a:lnSpc>
+                <a:spcPts val="1820"/>
+              </a:lnSpc>
+              <a:spcBef>
+                <a:spcPts val="300"/>
+              </a:spcBef>
+              <a:spcAft>
+                <a:spcPts val="300"/>
+              </a:spcAft>
+              <a:buNone/>
+            </a:pPr>
+            <a:r>
+              <a:rPr lang="en-US" sz="1300" i="1" dirty="0">
+                <a:solidFill>
+                  <a:srgbClr val="1C2833"/>
+                </a:solidFill>
+                <a:latin typeface="Georgia" pitchFamily="34" charset="0"/>
+                <a:ea typeface="Georgia" pitchFamily="34" charset="-122"/>
+                <a:cs typeface="Georgia" pitchFamily="34" charset="-120"/>
+              </a:rPr>
+              <a:t>Today's baseline: my time using my normal method = ____ seconds. My time using dot method (first try) = ____ seconds. I expect this gap to shrink by Day 5.</a:t>
+            </a:r>
+            <a:endParaRPr lang="en-US" sz="1300" dirty="0"/>
+          </a:p>
+        </p:txBody>
+      </p:sp>
+      <p:sp>
+        <p:nvSpPr>
+          <p:cNvPr id="10" name="Text 8"/>
+          <p:cNvSpPr/>
+          <p:nvPr/>
+        </p:nvSpPr>
+        <p:spPr>
+          <a:xfrm>
+            <a:off x="406301" y="4434929"/>
+            <a:ext cx="8498026" cy="213271"/>
+          </a:xfrm>
+          <a:prstGeom prst="rect">
+            <a:avLst/>
+          </a:prstGeom>
+          <a:noFill/>
+          <a:ln/>
+        </p:spPr>
+        <p:txBody>
+          <a:bodyPr wrap="square" lIns="0" tIns="0" rIns="0" bIns="0" rtlCol="0" anchor="t"/>
+          <a:lstStyle/>
+          <a:p>
+            <a:pPr algn="l" indent="0" marL="0">
+              <a:lnSpc>
+                <a:spcPts val="1680"/>
+              </a:lnSpc>
+              <a:spcBef>
+                <a:spcPts val="300"/>
+              </a:spcBef>
+              <a:spcAft>
+                <a:spcPts val="300"/>
+              </a:spcAft>
+              <a:buNone/>
+            </a:pPr>
+            <a:r>
+              <a:rPr lang="en-US" sz="1200" dirty="0">
+                <a:solidFill>
+                  <a:srgbClr val="1C2833"/>
+                </a:solidFill>
+                <a:latin typeface="Arial" pitchFamily="34" charset="0"/>
+                <a:ea typeface="Arial" pitchFamily="34" charset="-122"/>
+                <a:cs typeface="Arial" pitchFamily="34" charset="-120"/>
+              </a:rPr>
+              <a:t>Middle ·  · IKS Curriculum</a:t>
+            </a:r>
+            <a:endParaRPr lang="en-US" sz="1200" dirty="0"/>
+          </a:p>
+        </p:txBody>
+      </p:sp>
+    </p:spTree>
+  </p:cSld>
+  <p:clrMapOvr>
+    <a:masterClrMapping/>
+  </p:clrMapOvr>
+</p:sld>
+</file>
+
+<file path=ppt/slides/slide15.xml><?xml version="1.0" encoding="utf-8"?>
+<p:sld xmlns:a="http://schemas.openxmlformats.org/drawingml/2006/main" xmlns:r="http://schemas.openxmlformats.org/officeDocument/2006/relationships" xmlns:p="http://schemas.openxmlformats.org/presentationml/2006/main">
+  <p:cSld name="Slide 15">
+    <p:bg>
+      <p:bgPr>
+        <a:solidFill>
+          <a:srgbClr val="FFFFFF"/>
+        </a:solidFill>
+      </p:bgPr>
+    </p:bg>
+    <p:spTree>
+      <p:nvGrpSpPr>
+        <p:cNvPr id="1" name=""/>
+        <p:cNvGrpSpPr/>
+        <p:nvPr/>
+      </p:nvGrpSpPr>
+      <p:grpSpPr>
+        <a:xfrm>
+          <a:off x="0" y="0"/>
+          <a:ext cx="0" cy="0"/>
+          <a:chOff x="0" y="0"/>
+          <a:chExt cx="0" cy="0"/>
+        </a:xfrm>
+      </p:grpSpPr>
+      <p:sp>
+        <p:nvSpPr>
+          <p:cNvPr id="2" name="Text 0"/>
+          <p:cNvSpPr/>
+          <p:nvPr/>
+        </p:nvSpPr>
+        <p:spPr>
+          <a:xfrm>
+            <a:off x="0" y="0"/>
+            <a:ext cx="9144000" cy="101501"/>
+          </a:xfrm>
+          <a:prstGeom prst="rect">
+            <a:avLst/>
+          </a:prstGeom>
+          <a:solidFill>
+            <a:srgbClr val="277884"/>
+          </a:solidFill>
+          <a:ln/>
+        </p:spPr>
+        <p:txBody>
+          <a:bodyPr wrap="square" rtlCol="0" anchor="ctr"/>
+          <a:lstStyle/>
+          <a:p>
+            <a:pPr indent="0" marL="0">
+              <a:buNone/>
+            </a:pPr>
+            <a:endParaRPr lang="en-US" dirty="0"/>
+          </a:p>
+        </p:txBody>
+      </p:sp>
+      <p:sp>
+        <p:nvSpPr>
+          <p:cNvPr id="3" name="Text 1"/>
+          <p:cNvSpPr/>
+          <p:nvPr/>
+        </p:nvSpPr>
+        <p:spPr>
+          <a:xfrm>
+            <a:off x="406301" y="457051"/>
+            <a:ext cx="8498026" cy="274290"/>
+          </a:xfrm>
+          <a:prstGeom prst="rect">
+            <a:avLst/>
+          </a:prstGeom>
+          <a:noFill/>
+          <a:ln/>
+        </p:spPr>
+        <p:txBody>
+          <a:bodyPr wrap="square" lIns="0" tIns="0" rIns="0" bIns="0" rtlCol="0" anchor="t"/>
+          <a:lstStyle/>
+          <a:p>
+            <a:pPr algn="l" indent="0" marL="0">
+              <a:lnSpc>
+                <a:spcPts val="2160"/>
+              </a:lnSpc>
+              <a:spcBef>
+                <a:spcPts val="600"/>
+              </a:spcBef>
+              <a:spcAft>
+                <a:spcPts val="800"/>
+              </a:spcAft>
+              <a:buNone/>
+            </a:pPr>
+            <a:r>
+              <a:rPr lang="en-US" sz="1800" b="1" dirty="0">
+                <a:solidFill>
+                  <a:srgbClr val="FE4447"/>
+                </a:solidFill>
+                <a:latin typeface="Georgia" pitchFamily="34" charset="0"/>
+                <a:ea typeface="Georgia" pitchFamily="34" charset="-122"/>
+                <a:cs typeface="Georgia" pitchFamily="34" charset="-120"/>
+              </a:rPr>
+              <a:t>Homework</a:t>
+            </a:r>
+            <a:endParaRPr lang="en-US" sz="1800" dirty="0"/>
+          </a:p>
+        </p:txBody>
+      </p:sp>
+      <p:sp>
+        <p:nvSpPr>
+          <p:cNvPr id="4" name="Text 2"/>
+          <p:cNvSpPr/>
+          <p:nvPr/>
+        </p:nvSpPr>
+        <p:spPr>
+          <a:xfrm>
+            <a:off x="634901" y="883593"/>
+            <a:ext cx="8102798" cy="731341"/>
+          </a:xfrm>
+          <a:prstGeom prst="rect">
+            <a:avLst/>
+          </a:prstGeom>
+          <a:noFill/>
+          <a:ln/>
+        </p:spPr>
+        <p:txBody>
+          <a:bodyPr wrap="square" lIns="0" tIns="0" rIns="0" bIns="0" rtlCol="0" anchor="t"/>
+          <a:lstStyle/>
+          <a:p>
+            <a:pPr algn="l" marL="342900" indent="-342900">
+              <a:lnSpc>
+                <a:spcPts val="1620"/>
+              </a:lnSpc>
+              <a:spcAft>
+                <a:spcPts val="300"/>
+              </a:spcAft>
+              <a:buSzPct val="100000"/>
+              <a:buChar char="•"/>
+            </a:pPr>
+            <a:r>
+              <a:rPr lang="en-US" sz="1200" dirty="0">
+                <a:solidFill>
+                  <a:srgbClr val="1C2833"/>
+                </a:solidFill>
+                <a:latin typeface="Arial" pitchFamily="34" charset="0"/>
+                <a:ea typeface="Arial" pitchFamily="34" charset="-122"/>
+                <a:cs typeface="Arial" pitchFamily="34" charset="-120"/>
+              </a:rPr>
+              <a:t>Practice the "make 10" reflex: 10 quick pairs. 8+? = 10. 3+? = 10. 6+? = 10. 4+? = 10. 9+? = 10. 1+? = 10. 7+? = 10. 5+? = 10. 2+? = 10. 0+? = 10.</a:t>
+            </a:r>
+            <a:endParaRPr lang="en-US" sz="1200" dirty="0"/>
+          </a:p>
+          <a:p>
+            <a:pPr algn="l" marL="342900" indent="-342900">
+              <a:lnSpc>
+                <a:spcPts val="1620"/>
+              </a:lnSpc>
+              <a:spcAft>
+                <a:spcPts val="300"/>
+              </a:spcAft>
+              <a:buSzPct val="100000"/>
+              <a:buChar char="•"/>
+            </a:pPr>
+            <a:r>
+              <a:rPr lang="en-US" sz="1200" dirty="0">
+                <a:solidFill>
+                  <a:srgbClr val="1C2833"/>
+                </a:solidFill>
+                <a:latin typeface="Arial" pitchFamily="34" charset="0"/>
+                <a:ea typeface="Arial" pitchFamily="34" charset="-122"/>
+                <a:cs typeface="Arial" pitchFamily="34" charset="-120"/>
+              </a:rPr>
+              <a:t>Do all 10 in under 15 seconds.</a:t>
+            </a:r>
+            <a:endParaRPr lang="en-US" sz="1200" dirty="0"/>
+          </a:p>
+        </p:txBody>
+      </p:sp>
+      <p:sp>
+        <p:nvSpPr>
+          <p:cNvPr id="5" name="Text 3"/>
+          <p:cNvSpPr/>
+          <p:nvPr/>
+        </p:nvSpPr>
+        <p:spPr>
+          <a:xfrm>
+            <a:off x="406301" y="4434929"/>
+            <a:ext cx="8498026" cy="213271"/>
+          </a:xfrm>
+          <a:prstGeom prst="rect">
+            <a:avLst/>
+          </a:prstGeom>
+          <a:noFill/>
+          <a:ln/>
+        </p:spPr>
+        <p:txBody>
+          <a:bodyPr wrap="square" lIns="0" tIns="0" rIns="0" bIns="0" rtlCol="0" anchor="t"/>
+          <a:lstStyle/>
+          <a:p>
+            <a:pPr algn="l" indent="0" marL="0">
+              <a:lnSpc>
+                <a:spcPts val="1680"/>
+              </a:lnSpc>
+              <a:spcBef>
+                <a:spcPts val="300"/>
+              </a:spcBef>
+              <a:spcAft>
+                <a:spcPts val="300"/>
+              </a:spcAft>
+              <a:buNone/>
+            </a:pPr>
+            <a:r>
+              <a:rPr lang="en-US" sz="1200" dirty="0">
+                <a:solidFill>
+                  <a:srgbClr val="1C2833"/>
+                </a:solidFill>
+                <a:latin typeface="Arial" pitchFamily="34" charset="0"/>
+                <a:ea typeface="Arial" pitchFamily="34" charset="-122"/>
+                <a:cs typeface="Arial" pitchFamily="34" charset="-120"/>
+              </a:rPr>
+              <a:t>Middle ·  · IKS Curriculum</a:t>
+            </a:r>
+            <a:endParaRPr lang="en-US" sz="1200" dirty="0"/>
+          </a:p>
+        </p:txBody>
+      </p:sp>
+    </p:spTree>
+  </p:cSld>
+  <p:clrMapOvr>
+    <a:masterClrMapping/>
+  </p:clrMapOvr>
+</p:sld>
+</file>
+
+<file path=ppt/slides/slide16.xml><?xml version="1.0" encoding="utf-8"?>
+<p:sld xmlns:a="http://schemas.openxmlformats.org/drawingml/2006/main" xmlns:r="http://schemas.openxmlformats.org/officeDocument/2006/relationships" xmlns:p="http://schemas.openxmlformats.org/presentationml/2006/main">
+  <p:cSld name="Slide 16">
+    <p:bg>
+      <p:bgPr>
+        <a:solidFill>
+          <a:srgbClr val="FFFFFF"/>
+        </a:solidFill>
+      </p:bgPr>
+    </p:bg>
+    <p:spTree>
+      <p:nvGrpSpPr>
+        <p:cNvPr id="1" name=""/>
+        <p:cNvGrpSpPr/>
+        <p:nvPr/>
+      </p:nvGrpSpPr>
+      <p:grpSpPr>
+        <a:xfrm>
+          <a:off x="0" y="0"/>
+          <a:ext cx="0" cy="0"/>
+          <a:chOff x="0" y="0"/>
+          <a:chExt cx="0" cy="0"/>
+        </a:xfrm>
+      </p:grpSpPr>
+      <p:sp>
+        <p:nvSpPr>
+          <p:cNvPr id="2" name="Text 0"/>
+          <p:cNvSpPr/>
+          <p:nvPr/>
+        </p:nvSpPr>
+        <p:spPr>
+          <a:xfrm>
+            <a:off x="0" y="0"/>
+            <a:ext cx="9144000" cy="101501"/>
+          </a:xfrm>
+          <a:prstGeom prst="rect">
+            <a:avLst/>
+          </a:prstGeom>
+          <a:solidFill>
+            <a:srgbClr val="277884"/>
+          </a:solidFill>
+          <a:ln/>
+        </p:spPr>
+        <p:txBody>
+          <a:bodyPr wrap="square" rtlCol="0" anchor="ctr"/>
+          <a:lstStyle/>
+          <a:p>
+            <a:pPr indent="0" marL="0">
+              <a:buNone/>
+            </a:pPr>
+            <a:endParaRPr lang="en-US" dirty="0"/>
+          </a:p>
+        </p:txBody>
+      </p:sp>
+      <p:sp>
+        <p:nvSpPr>
+          <p:cNvPr id="3" name="Text 1"/>
+          <p:cNvSpPr/>
+          <p:nvPr/>
+        </p:nvSpPr>
+        <p:spPr>
+          <a:xfrm>
+            <a:off x="406301" y="457051"/>
+            <a:ext cx="8498026" cy="274290"/>
+          </a:xfrm>
+          <a:prstGeom prst="rect">
+            <a:avLst/>
+          </a:prstGeom>
+          <a:noFill/>
+          <a:ln/>
+        </p:spPr>
+        <p:txBody>
+          <a:bodyPr wrap="square" lIns="0" tIns="0" rIns="0" bIns="0" rtlCol="0" anchor="t"/>
+          <a:lstStyle/>
+          <a:p>
+            <a:pPr algn="l" indent="0" marL="0">
+              <a:lnSpc>
+                <a:spcPts val="2160"/>
+              </a:lnSpc>
+              <a:spcBef>
+                <a:spcPts val="600"/>
+              </a:spcBef>
+              <a:spcAft>
+                <a:spcPts val="800"/>
+              </a:spcAft>
+              <a:buNone/>
+            </a:pPr>
+            <a:r>
+              <a:rPr lang="en-US" sz="1800" b="1" dirty="0">
+                <a:solidFill>
+                  <a:srgbClr val="FE4447"/>
+                </a:solidFill>
+                <a:latin typeface="Georgia" pitchFamily="34" charset="0"/>
+                <a:ea typeface="Georgia" pitchFamily="34" charset="-122"/>
+                <a:cs typeface="Georgia" pitchFamily="34" charset="-120"/>
+              </a:rPr>
+              <a:t>Differentiation</a:t>
+            </a:r>
+            <a:endParaRPr lang="en-US" sz="1800" dirty="0"/>
+          </a:p>
+        </p:txBody>
+      </p:sp>
+      <p:sp>
+        <p:nvSpPr>
+          <p:cNvPr id="4" name="Text 2"/>
+          <p:cNvSpPr/>
+          <p:nvPr/>
+        </p:nvSpPr>
+        <p:spPr>
+          <a:xfrm>
+            <a:off x="634901" y="883593"/>
+            <a:ext cx="8102798" cy="525661"/>
+          </a:xfrm>
+          <a:prstGeom prst="rect">
+            <a:avLst/>
+          </a:prstGeom>
+          <a:noFill/>
+          <a:ln/>
+        </p:spPr>
+        <p:txBody>
+          <a:bodyPr wrap="square" lIns="0" tIns="0" rIns="0" bIns="0" rtlCol="0" anchor="t"/>
+          <a:lstStyle/>
+          <a:p>
+            <a:pPr algn="l" marL="342900" indent="-342900">
+              <a:lnSpc>
+                <a:spcPts val="1620"/>
+              </a:lnSpc>
+              <a:spcAft>
+                <a:spcPts val="300"/>
+              </a:spcAft>
+              <a:buSzPct val="100000"/>
+              <a:buChar char="•"/>
+            </a:pPr>
+            <a:r>
+              <a:rPr lang="en-US" sz="1200" b="1" dirty="0">
+                <a:solidFill>
+                  <a:srgbClr val="1C2833"/>
+                </a:solidFill>
+                <a:latin typeface="Arial" pitchFamily="34" charset="0"/>
+                <a:ea typeface="Arial" pitchFamily="34" charset="-122"/>
+                <a:cs typeface="Arial" pitchFamily="34" charset="-120"/>
+              </a:rPr>
+              <a:t>Tier up:</a:t>
+            </a:r>
+            <a:pPr algn="l" indent="0" marL="0">
+              <a:lnSpc>
+                <a:spcPts val="1620"/>
+              </a:lnSpc>
+              <a:spcAft>
+                <a:spcPts val="300"/>
+              </a:spcAft>
+              <a:buNone/>
+            </a:pPr>
+            <a:r>
+              <a:rPr lang="en-US" sz="1200" dirty="0">
+                <a:solidFill>
+                  <a:srgbClr val="1C2833"/>
+                </a:solidFill>
+                <a:latin typeface="Arial" pitchFamily="34" charset="0"/>
+                <a:ea typeface="Arial" pitchFamily="34" charset="-122"/>
+                <a:cs typeface="Arial" pitchFamily="34" charset="-120"/>
+              </a:rPr>
+              <a:t> Try the dot method on a 5-addend × 5-digit problem. Time it.</a:t>
+            </a:r>
+            <a:endParaRPr lang="en-US" sz="1200" dirty="0"/>
+          </a:p>
+          <a:p>
+            <a:pPr algn="l" marL="342900" indent="-342900">
+              <a:lnSpc>
+                <a:spcPts val="1620"/>
+              </a:lnSpc>
+              <a:spcAft>
+                <a:spcPts val="300"/>
+              </a:spcAft>
+              <a:buSzPct val="100000"/>
+              <a:buChar char="•"/>
+            </a:pPr>
+            <a:r>
+              <a:rPr lang="en-US" sz="1200" b="1" dirty="0">
+                <a:solidFill>
+                  <a:srgbClr val="1C2833"/>
+                </a:solidFill>
+                <a:latin typeface="Arial" pitchFamily="34" charset="0"/>
+                <a:ea typeface="Arial" pitchFamily="34" charset="-122"/>
+                <a:cs typeface="Arial" pitchFamily="34" charset="-120"/>
+              </a:rPr>
+              <a:t>Tier down:</a:t>
+            </a:r>
+            <a:pPr algn="l" indent="0" marL="0">
+              <a:lnSpc>
+                <a:spcPts val="1620"/>
+              </a:lnSpc>
+              <a:spcAft>
+                <a:spcPts val="300"/>
+              </a:spcAft>
+              <a:buNone/>
+            </a:pPr>
+            <a:r>
+              <a:rPr lang="en-US" sz="1200" dirty="0">
+                <a:solidFill>
+                  <a:srgbClr val="1C2833"/>
+                </a:solidFill>
+                <a:latin typeface="Arial" pitchFamily="34" charset="0"/>
+                <a:ea typeface="Arial" pitchFamily="34" charset="-122"/>
+                <a:cs typeface="Arial" pitchFamily="34" charset="-120"/>
+              </a:rPr>
+              <a:t> If 4-digit columns are too hard, drop to 3-addend × 3-digit for today. We'll scale up.</a:t>
+            </a:r>
+            <a:endParaRPr lang="en-US" sz="1200" dirty="0"/>
+          </a:p>
+        </p:txBody>
+      </p:sp>
+      <p:sp>
+        <p:nvSpPr>
+          <p:cNvPr id="5" name="Text 3"/>
+          <p:cNvSpPr/>
+          <p:nvPr/>
+        </p:nvSpPr>
+        <p:spPr>
+          <a:xfrm>
+            <a:off x="406301" y="4434929"/>
+            <a:ext cx="8498026" cy="213271"/>
+          </a:xfrm>
+          <a:prstGeom prst="rect">
+            <a:avLst/>
+          </a:prstGeom>
+          <a:noFill/>
+          <a:ln/>
+        </p:spPr>
+        <p:txBody>
+          <a:bodyPr wrap="square" lIns="0" tIns="0" rIns="0" bIns="0" rtlCol="0" anchor="t"/>
+          <a:lstStyle/>
+          <a:p>
+            <a:pPr algn="l" indent="0" marL="0">
+              <a:lnSpc>
+                <a:spcPts val="1680"/>
+              </a:lnSpc>
+              <a:spcBef>
+                <a:spcPts val="300"/>
+              </a:spcBef>
+              <a:spcAft>
+                <a:spcPts val="300"/>
+              </a:spcAft>
+              <a:buNone/>
+            </a:pPr>
+            <a:r>
+              <a:rPr lang="en-US" sz="1200" dirty="0">
+                <a:solidFill>
+                  <a:srgbClr val="1C2833"/>
+                </a:solidFill>
+                <a:latin typeface="Arial" pitchFamily="34" charset="0"/>
+                <a:ea typeface="Arial" pitchFamily="34" charset="-122"/>
+                <a:cs typeface="Arial" pitchFamily="34" charset="-120"/>
+              </a:rPr>
+              <a:t>Middle ·  · IKS Curriculum</a:t>
+            </a:r>
+            <a:endParaRPr lang="en-US" sz="1200" dirty="0"/>
+          </a:p>
+        </p:txBody>
+      </p:sp>
+    </p:spTree>
+  </p:cSld>
+  <p:clrMapOvr>
+    <a:masterClrMapping/>
+  </p:clrMapOvr>
+</p:sld>
+</file>
+
+<file path=ppt/slides/slide17.xml><?xml version="1.0" encoding="utf-8"?>
+<p:sld xmlns:a="http://schemas.openxmlformats.org/drawingml/2006/main" xmlns:r="http://schemas.openxmlformats.org/officeDocument/2006/relationships" xmlns:p="http://schemas.openxmlformats.org/presentationml/2006/main">
+  <p:cSld name="Slide 17">
+    <p:bg>
+      <p:bgPr>
+        <a:solidFill>
+          <a:srgbClr val="FFFFFF"/>
+        </a:solidFill>
+      </p:bgPr>
+    </p:bg>
+    <p:spTree>
+      <p:nvGrpSpPr>
+        <p:cNvPr id="1" name=""/>
+        <p:cNvGrpSpPr/>
+        <p:nvPr/>
+      </p:nvGrpSpPr>
+      <p:grpSpPr>
+        <a:xfrm>
+          <a:off x="0" y="0"/>
+          <a:ext cx="0" cy="0"/>
+          <a:chOff x="0" y="0"/>
+          <a:chExt cx="0" cy="0"/>
+        </a:xfrm>
+      </p:grpSpPr>
+      <p:sp>
+        <p:nvSpPr>
+          <p:cNvPr id="2" name="Text 0"/>
+          <p:cNvSpPr/>
+          <p:nvPr/>
+        </p:nvSpPr>
+        <p:spPr>
+          <a:xfrm>
+            <a:off x="0" y="0"/>
+            <a:ext cx="9144000" cy="101501"/>
+          </a:xfrm>
+          <a:prstGeom prst="rect">
+            <a:avLst/>
+          </a:prstGeom>
+          <a:solidFill>
+            <a:srgbClr val="277884"/>
+          </a:solidFill>
+          <a:ln/>
+        </p:spPr>
+        <p:txBody>
+          <a:bodyPr wrap="square" rtlCol="0" anchor="ctr"/>
+          <a:lstStyle/>
+          <a:p>
+            <a:pPr indent="0" marL="0">
+              <a:buNone/>
+            </a:pPr>
+            <a:endParaRPr lang="en-US" dirty="0"/>
+          </a:p>
+        </p:txBody>
+      </p:sp>
+      <p:sp>
+        <p:nvSpPr>
+          <p:cNvPr id="3" name="Text 1"/>
+          <p:cNvSpPr/>
+          <p:nvPr/>
+        </p:nvSpPr>
+        <p:spPr>
+          <a:xfrm>
+            <a:off x="406301" y="457051"/>
+            <a:ext cx="8498026" cy="274290"/>
+          </a:xfrm>
+          <a:prstGeom prst="rect">
+            <a:avLst/>
+          </a:prstGeom>
+          <a:noFill/>
+          <a:ln/>
+        </p:spPr>
+        <p:txBody>
+          <a:bodyPr wrap="square" lIns="0" tIns="0" rIns="0" bIns="0" rtlCol="0" anchor="t"/>
+          <a:lstStyle/>
+          <a:p>
+            <a:pPr algn="l" indent="0" marL="0">
+              <a:lnSpc>
+                <a:spcPts val="2160"/>
+              </a:lnSpc>
+              <a:spcBef>
+                <a:spcPts val="600"/>
+              </a:spcBef>
+              <a:spcAft>
+                <a:spcPts val="800"/>
+              </a:spcAft>
+              <a:buNone/>
+            </a:pPr>
+            <a:r>
+              <a:rPr lang="en-US" sz="1800" b="1" dirty="0">
+                <a:solidFill>
+                  <a:srgbClr val="FE4447"/>
+                </a:solidFill>
+                <a:latin typeface="Georgia" pitchFamily="34" charset="0"/>
+                <a:ea typeface="Georgia" pitchFamily="34" charset="-122"/>
+                <a:cs typeface="Georgia" pitchFamily="34" charset="-120"/>
+              </a:rPr>
+              <a:t>Teacher notes</a:t>
+            </a:r>
+            <a:endParaRPr lang="en-US" sz="1800" dirty="0"/>
+          </a:p>
+        </p:txBody>
+      </p:sp>
+      <p:sp>
+        <p:nvSpPr>
+          <p:cNvPr id="4" name="Text 2"/>
+          <p:cNvSpPr/>
+          <p:nvPr/>
+        </p:nvSpPr>
+        <p:spPr>
+          <a:xfrm>
+            <a:off x="634901" y="883593"/>
+            <a:ext cx="8102798" cy="975122"/>
+          </a:xfrm>
+          <a:prstGeom prst="rect">
+            <a:avLst/>
+          </a:prstGeom>
+          <a:noFill/>
+          <a:ln/>
+        </p:spPr>
+        <p:txBody>
+          <a:bodyPr wrap="square" lIns="0" tIns="0" rIns="0" bIns="0" rtlCol="0" anchor="t"/>
+          <a:lstStyle/>
+          <a:p>
+            <a:pPr algn="l" marL="342900" indent="-342900">
+              <a:lnSpc>
+                <a:spcPts val="1620"/>
+              </a:lnSpc>
+              <a:spcAft>
+                <a:spcPts val="300"/>
+              </a:spcAft>
+              <a:buSzPct val="100000"/>
+              <a:buChar char="•"/>
+            </a:pPr>
+            <a:r>
+              <a:rPr lang="en-US" sz="1200" dirty="0">
+                <a:solidFill>
+                  <a:srgbClr val="1C2833"/>
+                </a:solidFill>
+                <a:latin typeface="Arial" pitchFamily="34" charset="0"/>
+                <a:ea typeface="Arial" pitchFamily="34" charset="-122"/>
+                <a:cs typeface="Arial" pitchFamily="34" charset="-120"/>
+              </a:rPr>
+              <a:t>The baseline time is the </a:t>
+            </a:r>
+            <a:pPr algn="l" indent="0" marL="0">
+              <a:lnSpc>
+                <a:spcPts val="1620"/>
+              </a:lnSpc>
+              <a:spcAft>
+                <a:spcPts val="300"/>
+              </a:spcAft>
+              <a:buNone/>
+            </a:pPr>
+            <a:r>
+              <a:rPr lang="en-US" sz="1200" i="1" dirty="0">
+                <a:solidFill>
+                  <a:srgbClr val="1C2833"/>
+                </a:solidFill>
+                <a:latin typeface="Arial" pitchFamily="34" charset="0"/>
+                <a:ea typeface="Arial" pitchFamily="34" charset="-122"/>
+                <a:cs typeface="Arial" pitchFamily="34" charset="-120"/>
+              </a:rPr>
+              <a:t>single most important</a:t>
+            </a:r>
+            <a:pPr algn="l" indent="0" marL="0">
+              <a:lnSpc>
+                <a:spcPts val="1620"/>
+              </a:lnSpc>
+              <a:spcAft>
+                <a:spcPts val="300"/>
+              </a:spcAft>
+              <a:buNone/>
+            </a:pPr>
+            <a:r>
+              <a:rPr lang="en-US" sz="1200" dirty="0">
+                <a:solidFill>
+                  <a:srgbClr val="1C2833"/>
+                </a:solidFill>
+                <a:latin typeface="Arial" pitchFamily="34" charset="0"/>
+                <a:ea typeface="Arial" pitchFamily="34" charset="-122"/>
+                <a:cs typeface="Arial" pitchFamily="34" charset="-120"/>
+              </a:rPr>
+              <a:t> artefact of Day 1. Make sure every student records it honestly. Day 5's retest depends on it.</a:t>
+            </a:r>
+            <a:endParaRPr lang="en-US" sz="1200" dirty="0"/>
+          </a:p>
+          <a:p>
+            <a:pPr algn="l" marL="342900" indent="-342900">
+              <a:lnSpc>
+                <a:spcPts val="1620"/>
+              </a:lnSpc>
+              <a:spcAft>
+                <a:spcPts val="300"/>
+              </a:spcAft>
+              <a:buSzPct val="100000"/>
+              <a:buChar char="•"/>
+            </a:pPr>
+            <a:r>
+              <a:rPr lang="en-US" sz="1200" dirty="0">
+                <a:solidFill>
+                  <a:srgbClr val="1C2833"/>
+                </a:solidFill>
+                <a:latin typeface="Arial" pitchFamily="34" charset="0"/>
+                <a:ea typeface="Arial" pitchFamily="34" charset="-122"/>
+                <a:cs typeface="Arial" pitchFamily="34" charset="-120"/>
+              </a:rPr>
+              <a:t>Don't promise a specific speedup — say "you'll likely be faster by Day 5; how much depends on you."</a:t>
+            </a:r>
+            <a:endParaRPr lang="en-US" sz="1200" dirty="0"/>
+          </a:p>
+          <a:p>
+            <a:pPr algn="l" marL="342900" indent="-342900">
+              <a:lnSpc>
+                <a:spcPts val="1620"/>
+              </a:lnSpc>
+              <a:spcAft>
+                <a:spcPts val="300"/>
+              </a:spcAft>
+              <a:buSzPct val="100000"/>
+              <a:buChar char="•"/>
+            </a:pPr>
+            <a:r>
+              <a:rPr lang="en-US" sz="1200" dirty="0">
+                <a:solidFill>
+                  <a:srgbClr val="1C2833"/>
+                </a:solidFill>
+                <a:latin typeface="Arial" pitchFamily="34" charset="0"/>
+                <a:ea typeface="Arial" pitchFamily="34" charset="-122"/>
+                <a:cs typeface="Arial" pitchFamily="34" charset="-120"/>
+              </a:rPr>
+              <a:t>Walk around during the demo and notice who looks confused. Pull them aside in the wrap-up minute.</a:t>
+            </a:r>
+            <a:endParaRPr lang="en-US" sz="1200" dirty="0"/>
+          </a:p>
+        </p:txBody>
+      </p:sp>
+      <p:sp>
+        <p:nvSpPr>
+          <p:cNvPr id="5" name="Text 3"/>
+          <p:cNvSpPr/>
+          <p:nvPr/>
+        </p:nvSpPr>
+        <p:spPr>
+          <a:xfrm>
+            <a:off x="406301" y="4434929"/>
+            <a:ext cx="8498026" cy="213271"/>
+          </a:xfrm>
+          <a:prstGeom prst="rect">
+            <a:avLst/>
+          </a:prstGeom>
+          <a:noFill/>
+          <a:ln/>
+        </p:spPr>
+        <p:txBody>
+          <a:bodyPr wrap="square" lIns="0" tIns="0" rIns="0" bIns="0" rtlCol="0" anchor="t"/>
+          <a:lstStyle/>
+          <a:p>
+            <a:pPr algn="l" indent="0" marL="0">
+              <a:lnSpc>
+                <a:spcPts val="1680"/>
+              </a:lnSpc>
+              <a:spcBef>
+                <a:spcPts val="300"/>
+              </a:spcBef>
+              <a:spcAft>
+                <a:spcPts val="300"/>
+              </a:spcAft>
+              <a:buNone/>
+            </a:pPr>
+            <a:r>
+              <a:rPr lang="en-US" sz="1200" dirty="0">
+                <a:solidFill>
+                  <a:srgbClr val="1C2833"/>
+                </a:solidFill>
+                <a:latin typeface="Arial" pitchFamily="34" charset="0"/>
+                <a:ea typeface="Arial" pitchFamily="34" charset="-122"/>
+                <a:cs typeface="Arial" pitchFamily="34" charset="-120"/>
+              </a:rPr>
+              <a:t>Middle ·  · IKS Curriculum</a:t>
+            </a:r>
+            <a:endParaRPr lang="en-US" sz="1200" dirty="0"/>
+          </a:p>
+        </p:txBody>
+      </p:sp>
+    </p:spTree>
+  </p:cSld>
+  <p:clrMapOvr>
+    <a:masterClrMapping/>
+  </p:clrMapOvr>
+</p:sld>
+</file>
+
+<file path=ppt/slides/slide18.xml><?xml version="1.0" encoding="utf-8"?>
+<p:sld xmlns:a="http://schemas.openxmlformats.org/drawingml/2006/main" xmlns:r="http://schemas.openxmlformats.org/officeDocument/2006/relationships" xmlns:p="http://schemas.openxmlformats.org/presentationml/2006/main">
+  <p:cSld name="Slide 18">
+    <p:bg>
+      <p:bgPr>
+        <a:solidFill>
+          <a:srgbClr val="FFFFFF"/>
+        </a:solidFill>
+      </p:bgPr>
+    </p:bg>
+    <p:spTree>
+      <p:nvGrpSpPr>
+        <p:cNvPr id="1" name=""/>
+        <p:cNvGrpSpPr/>
+        <p:nvPr/>
+      </p:nvGrpSpPr>
+      <p:grpSpPr>
+        <a:xfrm>
+          <a:off x="0" y="0"/>
+          <a:ext cx="0" cy="0"/>
+          <a:chOff x="0" y="0"/>
+          <a:chExt cx="0" cy="0"/>
+        </a:xfrm>
+      </p:grpSpPr>
+      <p:sp>
+        <p:nvSpPr>
+          <p:cNvPr id="2" name="Text 0"/>
+          <p:cNvSpPr/>
+          <p:nvPr/>
+        </p:nvSpPr>
+        <p:spPr>
+          <a:xfrm>
+            <a:off x="0" y="0"/>
+            <a:ext cx="9144000" cy="101501"/>
+          </a:xfrm>
+          <a:prstGeom prst="rect">
+            <a:avLst/>
+          </a:prstGeom>
+          <a:solidFill>
+            <a:srgbClr val="277884"/>
+          </a:solidFill>
+          <a:ln/>
+        </p:spPr>
+        <p:txBody>
+          <a:bodyPr wrap="square" rtlCol="0" anchor="ctr"/>
+          <a:lstStyle/>
+          <a:p>
+            <a:pPr indent="0" marL="0">
+              <a:buNone/>
+            </a:pPr>
+            <a:endParaRPr lang="en-US" dirty="0"/>
+          </a:p>
+        </p:txBody>
+      </p:sp>
+      <p:sp>
+        <p:nvSpPr>
+          <p:cNvPr id="3" name="Text 1"/>
+          <p:cNvSpPr/>
+          <p:nvPr/>
+        </p:nvSpPr>
+        <p:spPr>
+          <a:xfrm>
+            <a:off x="406301" y="457051"/>
+            <a:ext cx="8498026" cy="274290"/>
+          </a:xfrm>
+          <a:prstGeom prst="rect">
+            <a:avLst/>
+          </a:prstGeom>
+          <a:noFill/>
+          <a:ln/>
+        </p:spPr>
+        <p:txBody>
+          <a:bodyPr wrap="square" lIns="0" tIns="0" rIns="0" bIns="0" rtlCol="0" anchor="t"/>
+          <a:lstStyle/>
+          <a:p>
+            <a:pPr algn="l" indent="0" marL="0">
+              <a:lnSpc>
+                <a:spcPts val="2160"/>
+              </a:lnSpc>
+              <a:spcBef>
+                <a:spcPts val="600"/>
+              </a:spcBef>
+              <a:spcAft>
+                <a:spcPts val="800"/>
+              </a:spcAft>
+              <a:buNone/>
+            </a:pPr>
+            <a:r>
+              <a:rPr lang="en-US" sz="1800" b="1" dirty="0">
+                <a:solidFill>
+                  <a:srgbClr val="FE4447"/>
+                </a:solidFill>
+                <a:latin typeface="Georgia" pitchFamily="34" charset="0"/>
+                <a:ea typeface="Georgia" pitchFamily="34" charset="-122"/>
+                <a:cs typeface="Georgia" pitchFamily="34" charset="-120"/>
+              </a:rPr>
               <a:t>Citation(s) used in this lesson</a:t>
             </a:r>
             <a:endParaRPr lang="en-US" sz="1800" dirty="0"/>
@@ -4032,7 +5629,7 @@
                 <a:ea typeface="Georgia" pitchFamily="34" charset="-122"/>
                 <a:cs typeface="Georgia" pitchFamily="34" charset="-120"/>
               </a:rPr>
-              <a:t>Materials</a:t>
+              <a:t>Learning objective</a:t>
             </a:r>
             <a:endParaRPr lang="en-US" sz="1800" dirty="0"/>
           </a:p>
@@ -4080,7 +5677,7 @@
                 <a:ea typeface="Arial" pitchFamily="34" charset="-122"/>
                 <a:cs typeface="Arial" pitchFamily="34" charset="-120"/>
               </a:rPr>
-              <a:t>– Printed baseline sheet: ONE column-addition problem (e.g. 5728 + 3417 + 6892 + 4536 = ?). One per student. – Stopwatch or wall clock with second hand. (One per pair is plenty.) – Whiteboard / large paper to demonstrate.</a:t>
+              <a:t>By the end of this lesson, students will record a personal baseline time for adding a 4-addend × 4-digit column using the standard algorithm, and will have seen the dot method solve the same problem visibly faster.</a:t>
             </a:r>
             <a:endParaRPr lang="en-US" sz="1200" dirty="0"/>
           </a:p>
@@ -4238,7 +5835,7 @@
                 <a:ea typeface="Georgia" pitchFamily="34" charset="-122"/>
                 <a:cs typeface="Georgia" pitchFamily="34" charset="-120"/>
               </a:rPr>
-              <a:t>Vocabulary introduced today</a:t>
+              <a:t>Materials</a:t>
             </a:r>
             <a:endParaRPr lang="en-US" sz="1800" dirty="0"/>
           </a:p>
@@ -4253,7 +5850,7 @@
         <p:spPr>
           <a:xfrm>
             <a:off x="634901" y="883593"/>
-            <a:ext cx="8102798" cy="281880"/>
+            <a:ext cx="8102798" cy="769441"/>
           </a:xfrm>
           <a:prstGeom prst="rect">
             <a:avLst/>
@@ -4276,7 +5873,7 @@
               <a:buChar char="•"/>
             </a:pPr>
             <a:r>
-              <a:rPr lang="en-US" sz="1200" i="1" dirty="0">
+              <a:rPr lang="en-US" sz="1200" dirty="0">
                 <a:solidFill>
                   <a:srgbClr val="1C2833"/>
                 </a:solidFill>
@@ -4284,16 +5881,20 @@
                 <a:ea typeface="Arial" pitchFamily="34" charset="-122"/>
                 <a:cs typeface="Arial" pitchFamily="34" charset="-120"/>
               </a:rPr>
-              <a:t>Bindu Paddhati</a:t>
-            </a:r>
-            <a:pPr algn="l" indent="0" marL="0">
+              <a:t>Printed baseline sheet: ONE column-addition problem (e.g. 5728 + 3417 + 6892 + 4536 = ?). One per student.</a:t>
+            </a:r>
+            <a:endParaRPr lang="en-US" sz="1200" dirty="0"/>
+          </a:p>
+          <a:p>
+            <a:pPr algn="l" marL="342900" indent="-342900">
               <a:lnSpc>
                 <a:spcPts val="1620"/>
               </a:lnSpc>
               <a:spcAft>
                 <a:spcPts val="300"/>
               </a:spcAft>
-              <a:buNone/>
+              <a:buSzPct val="100000"/>
+              <a:buChar char="•"/>
             </a:pPr>
             <a:r>
               <a:rPr lang="en-US" sz="1200" dirty="0">
@@ -4304,7 +5905,31 @@
                 <a:ea typeface="Arial" pitchFamily="34" charset="-122"/>
                 <a:cs typeface="Arial" pitchFamily="34" charset="-120"/>
               </a:rPr>
-              <a:t> (IAST: bindu-paddhati; lit. "dot method") — the technique we'll learn.</a:t>
+              <a:t>Stopwatch or wall clock with second hand. (One per pair is plenty.)</a:t>
+            </a:r>
+            <a:endParaRPr lang="en-US" sz="1200" dirty="0"/>
+          </a:p>
+          <a:p>
+            <a:pPr algn="l" marL="342900" indent="-342900">
+              <a:lnSpc>
+                <a:spcPts val="1620"/>
+              </a:lnSpc>
+              <a:spcAft>
+                <a:spcPts val="300"/>
+              </a:spcAft>
+              <a:buSzPct val="100000"/>
+              <a:buChar char="•"/>
+            </a:pPr>
+            <a:r>
+              <a:rPr lang="en-US" sz="1200" dirty="0">
+                <a:solidFill>
+                  <a:srgbClr val="1C2833"/>
+                </a:solidFill>
+                <a:latin typeface="Arial" pitchFamily="34" charset="0"/>
+                <a:ea typeface="Arial" pitchFamily="34" charset="-122"/>
+                <a:cs typeface="Arial" pitchFamily="34" charset="-120"/>
+              </a:rPr>
+              <a:t>Whiteboard / large paper to demonstrate.</a:t>
             </a:r>
             <a:endParaRPr lang="en-US" sz="1200" dirty="0"/>
           </a:p>
@@ -4462,7 +6087,7 @@
                 <a:ea typeface="Georgia" pitchFamily="34" charset="-122"/>
                 <a:cs typeface="Georgia" pitchFamily="34" charset="-120"/>
               </a:rPr>
-              <a:t>Lesson flow</a:t>
+              <a:t>Vocabulary introduced today</a:t>
             </a:r>
             <a:endParaRPr lang="en-US" sz="1800" dirty="0"/>
           </a:p>
@@ -4471,6 +6096,72 @@
       <p:sp>
         <p:nvSpPr>
           <p:cNvPr id="4" name="Text 2"/>
+          <p:cNvSpPr/>
+          <p:nvPr/>
+        </p:nvSpPr>
+        <p:spPr>
+          <a:xfrm>
+            <a:off x="634901" y="883593"/>
+            <a:ext cx="8102798" cy="281880"/>
+          </a:xfrm>
+          <a:prstGeom prst="rect">
+            <a:avLst/>
+          </a:prstGeom>
+          <a:noFill/>
+          <a:ln/>
+        </p:spPr>
+        <p:txBody>
+          <a:bodyPr wrap="square" lIns="0" tIns="0" rIns="0" bIns="0" rtlCol="0" anchor="t"/>
+          <a:lstStyle/>
+          <a:p>
+            <a:pPr algn="l" marL="342900" indent="-342900">
+              <a:lnSpc>
+                <a:spcPts val="1620"/>
+              </a:lnSpc>
+              <a:spcAft>
+                <a:spcPts val="300"/>
+              </a:spcAft>
+              <a:buSzPct val="100000"/>
+              <a:buChar char="•"/>
+            </a:pPr>
+            <a:r>
+              <a:rPr lang="en-US" sz="1200" i="1" dirty="0">
+                <a:solidFill>
+                  <a:srgbClr val="1C2833"/>
+                </a:solidFill>
+                <a:latin typeface="Arial" pitchFamily="34" charset="0"/>
+                <a:ea typeface="Arial" pitchFamily="34" charset="-122"/>
+                <a:cs typeface="Arial" pitchFamily="34" charset="-120"/>
+              </a:rPr>
+              <a:t>Bindu Paddhati</a:t>
+            </a:r>
+            <a:pPr algn="l" indent="0" marL="0">
+              <a:lnSpc>
+                <a:spcPts val="1620"/>
+              </a:lnSpc>
+              <a:spcAft>
+                <a:spcPts val="300"/>
+              </a:spcAft>
+              <a:buNone/>
+            </a:pPr>
+            <a:r>
+              <a:rPr lang="en-US" sz="1200" dirty="0">
+                <a:solidFill>
+                  <a:srgbClr val="1C2833"/>
+                </a:solidFill>
+                <a:latin typeface="Arial" pitchFamily="34" charset="0"/>
+                <a:ea typeface="Arial" pitchFamily="34" charset="-122"/>
+                <a:cs typeface="Arial" pitchFamily="34" charset="-120"/>
+              </a:rPr>
+              <a:t> (IAST: bindu-paddhati; lit. "dot method") — the technique we'll learn.</a:t>
+            </a:r>
+            <a:endParaRPr lang="en-US" sz="1200" dirty="0"/>
+          </a:p>
+        </p:txBody>
+      </p:sp>
+      <p:sp>
+        <p:nvSpPr>
+          <p:cNvPr id="5" name="Text 3"/>
           <p:cNvSpPr/>
           <p:nvPr/>
         </p:nvSpPr>
@@ -4620,7 +6311,7 @@
                 <a:ea typeface="Georgia" pitchFamily="34" charset="-122"/>
                 <a:cs typeface="Georgia" pitchFamily="34" charset="-120"/>
               </a:rPr>
-              <a:t>Warm-up (5 min)</a:t>
+              <a:t>Lesson flow</a:t>
             </a:r>
             <a:endParaRPr lang="en-US" sz="1800" dirty="0"/>
           </a:p>
@@ -4629,100 +6320,6 @@
       <p:sp>
         <p:nvSpPr>
           <p:cNvPr id="4" name="Text 2"/>
-          <p:cNvSpPr/>
-          <p:nvPr/>
-        </p:nvSpPr>
-        <p:spPr>
-          <a:xfrm>
-            <a:off x="406301" y="870942"/>
-            <a:ext cx="8498026" cy="426541"/>
-          </a:xfrm>
-          <a:prstGeom prst="rect">
-            <a:avLst/>
-          </a:prstGeom>
-          <a:noFill/>
-          <a:ln/>
-        </p:spPr>
-        <p:txBody>
-          <a:bodyPr wrap="square" lIns="0" tIns="0" rIns="0" bIns="0" rtlCol="0" anchor="t"/>
-          <a:lstStyle/>
-          <a:p>
-            <a:pPr algn="l" indent="0" marL="0">
-              <a:lnSpc>
-                <a:spcPts val="1680"/>
-              </a:lnSpc>
-              <a:spcBef>
-                <a:spcPts val="300"/>
-              </a:spcBef>
-              <a:spcAft>
-                <a:spcPts val="300"/>
-              </a:spcAft>
-              <a:buNone/>
-            </a:pPr>
-            <a:r>
-              <a:rPr lang="en-US" sz="1200" dirty="0">
-                <a:solidFill>
-                  <a:srgbClr val="1C2833"/>
-                </a:solidFill>
-                <a:latin typeface="Arial" pitchFamily="34" charset="0"/>
-                <a:ea typeface="Arial" pitchFamily="34" charset="-122"/>
-                <a:cs typeface="Arial" pitchFamily="34" charset="-120"/>
-              </a:rPr>
-              <a:t>– Teacher: </a:t>
-            </a:r>
-            <a:pPr algn="l" indent="0" marL="0">
-              <a:lnSpc>
-                <a:spcPts val="1680"/>
-              </a:lnSpc>
-              <a:spcBef>
-                <a:spcPts val="300"/>
-              </a:spcBef>
-              <a:spcAft>
-                <a:spcPts val="300"/>
-              </a:spcAft>
-              <a:buNone/>
-            </a:pPr>
-            <a:r>
-              <a:rPr lang="en-US" sz="1200" i="1" dirty="0">
-                <a:solidFill>
-                  <a:srgbClr val="1C2833"/>
-                </a:solidFill>
-                <a:latin typeface="Arial" pitchFamily="34" charset="0"/>
-                <a:ea typeface="Arial" pitchFamily="34" charset="-122"/>
-                <a:cs typeface="Arial" pitchFamily="34" charset="-120"/>
-              </a:rPr>
-              <a:t>"How long does it take you to add four 4-digit numbers? Make a guess."</a:t>
-            </a:r>
-            <a:pPr algn="l" indent="0" marL="0">
-              <a:lnSpc>
-                <a:spcPts val="1680"/>
-              </a:lnSpc>
-              <a:spcBef>
-                <a:spcPts val="300"/>
-              </a:spcBef>
-              <a:spcAft>
-                <a:spcPts val="300"/>
-              </a:spcAft>
-              <a:buNone/>
-            </a:pPr>
-            <a:r>
-              <a:rPr lang="en-US" sz="1200" dirty="0">
-                <a:solidFill>
-                  <a:srgbClr val="1C2833"/>
-                </a:solidFill>
-                <a:latin typeface="Arial" pitchFamily="34" charset="0"/>
-                <a:ea typeface="Arial" pitchFamily="34" charset="-122"/>
-                <a:cs typeface="Arial" pitchFamily="34" charset="-120"/>
-              </a:rPr>
-              <a:t> – Take 3–4 guesses. Write the range on the board (e.g. "30 sec to 2 min").</a:t>
-            </a:r>
-            <a:endParaRPr lang="en-US" sz="1200" dirty="0"/>
-          </a:p>
-        </p:txBody>
-      </p:sp>
-      <p:sp>
-        <p:nvSpPr>
-          <p:cNvPr id="5" name="Text 3"/>
           <p:cNvSpPr/>
           <p:nvPr/>
         </p:nvSpPr>
@@ -4872,7 +6469,7 @@
                 <a:ea typeface="Georgia" pitchFamily="34" charset="-122"/>
                 <a:cs typeface="Georgia" pitchFamily="34" charset="-120"/>
               </a:rPr>
-              <a:t>Baseline timing (10 min)</a:t>
+              <a:t>Warm-up (5 min)</a:t>
             </a:r>
             <a:endParaRPr lang="en-US" sz="1800" dirty="0"/>
           </a:p>
@@ -4886,8 +6483,8 @@
         </p:nvSpPr>
         <p:spPr>
           <a:xfrm>
-            <a:off x="406301" y="870942"/>
-            <a:ext cx="8498026" cy="639812"/>
+            <a:off x="634901" y="883593"/>
+            <a:ext cx="8102798" cy="525661"/>
           </a:xfrm>
           <a:prstGeom prst="rect">
             <a:avLst/>
@@ -4899,17 +6496,15 @@
           <a:bodyPr wrap="square" lIns="0" tIns="0" rIns="0" bIns="0" rtlCol="0" anchor="t"/>
           <a:lstStyle/>
           <a:p>
-            <a:pPr algn="l" indent="0" marL="0">
-              <a:lnSpc>
-                <a:spcPts val="1680"/>
-              </a:lnSpc>
-              <a:spcBef>
-                <a:spcPts val="300"/>
-              </a:spcBef>
-              <a:spcAft>
-                <a:spcPts val="300"/>
-              </a:spcAft>
-              <a:buNone/>
+            <a:pPr algn="l" marL="342900" indent="-342900">
+              <a:lnSpc>
+                <a:spcPts val="1620"/>
+              </a:lnSpc>
+              <a:spcAft>
+                <a:spcPts val="300"/>
+              </a:spcAft>
+              <a:buSzPct val="100000"/>
+              <a:buChar char="•"/>
             </a:pPr>
             <a:r>
               <a:rPr lang="en-US" sz="1200" dirty="0">
@@ -4920,22 +6515,19 @@
                 <a:ea typeface="Arial" pitchFamily="34" charset="-122"/>
                 <a:cs typeface="Arial" pitchFamily="34" charset="-120"/>
               </a:rPr>
-              <a:t>– Hand out the baseline sheet face-down. – Students write their name and predicted time on the back. – On "Go," flip and solve using whatever method they normally use (standard algorithm). – Record their actual time (the wall clock is running). – Mark answer; </a:t>
-            </a:r>
-            <a:pPr algn="l" indent="0" marL="0">
-              <a:lnSpc>
-                <a:spcPts val="1680"/>
-              </a:lnSpc>
-              <a:spcBef>
-                <a:spcPts val="300"/>
-              </a:spcBef>
-              <a:spcAft>
-                <a:spcPts val="300"/>
-              </a:spcAft>
-              <a:buNone/>
-            </a:pPr>
-            <a:r>
-              <a:rPr lang="en-US" sz="1200" b="1" dirty="0">
+              <a:t>Teacher: </a:t>
+            </a:r>
+            <a:pPr algn="l" indent="0" marL="0">
+              <a:lnSpc>
+                <a:spcPts val="1620"/>
+              </a:lnSpc>
+              <a:spcAft>
+                <a:spcPts val="300"/>
+              </a:spcAft>
+              <a:buNone/>
+            </a:pPr>
+            <a:r>
+              <a:rPr lang="en-US" sz="1200" i="1" dirty="0">
                 <a:solidFill>
                   <a:srgbClr val="1C2833"/>
                 </a:solidFill>
@@ -4943,19 +6535,20 @@
                 <a:ea typeface="Arial" pitchFamily="34" charset="-122"/>
                 <a:cs typeface="Arial" pitchFamily="34" charset="-120"/>
               </a:rPr>
-              <a:t>honest self-correction</a:t>
-            </a:r>
-            <a:pPr algn="l" indent="0" marL="0">
-              <a:lnSpc>
-                <a:spcPts val="1680"/>
-              </a:lnSpc>
-              <a:spcBef>
-                <a:spcPts val="300"/>
-              </a:spcBef>
-              <a:spcAft>
-                <a:spcPts val="300"/>
-              </a:spcAft>
-              <a:buNone/>
+              <a:t>"How long does it take you to add four 4-digit numbers? Make a guess."</a:t>
+            </a:r>
+            <a:endParaRPr lang="en-US" sz="1200" dirty="0"/>
+          </a:p>
+          <a:p>
+            <a:pPr algn="l" marL="342900" indent="-342900">
+              <a:lnSpc>
+                <a:spcPts val="1620"/>
+              </a:lnSpc>
+              <a:spcAft>
+                <a:spcPts val="300"/>
+              </a:spcAft>
+              <a:buSzPct val="100000"/>
+              <a:buChar char="•"/>
             </a:pPr>
             <a:r>
               <a:rPr lang="en-US" sz="1200" dirty="0">
@@ -4966,7 +6559,7 @@
                 <a:ea typeface="Arial" pitchFamily="34" charset="-122"/>
                 <a:cs typeface="Arial" pitchFamily="34" charset="-120"/>
               </a:rPr>
-              <a:t> — they're racing themselves over the module, not each other.</a:t>
+              <a:t>Take 3–4 guesses. Write the range on the board (e.g. "30 sec to 2 min").</a:t>
             </a:r>
             <a:endParaRPr lang="en-US" sz="1200" dirty="0"/>
           </a:p>
@@ -5124,7 +6717,7 @@
                 <a:ea typeface="Georgia" pitchFamily="34" charset="-122"/>
                 <a:cs typeface="Georgia" pitchFamily="34" charset="-120"/>
               </a:rPr>
-              <a:t>Teacher demonstration (10 min)</a:t>
+              <a:t>Baseline timing (10 min)</a:t>
             </a:r>
             <a:endParaRPr lang="en-US" sz="1800" dirty="0"/>
           </a:p>
@@ -5138,8 +6731,8 @@
         </p:nvSpPr>
         <p:spPr>
           <a:xfrm>
-            <a:off x="406301" y="870942"/>
-            <a:ext cx="8498026" cy="213271"/>
+            <a:off x="634901" y="883593"/>
+            <a:ext cx="8102798" cy="1257002"/>
           </a:xfrm>
           <a:prstGeom prst="rect">
             <a:avLst/>
@@ -5151,17 +6744,15 @@
           <a:bodyPr wrap="square" lIns="0" tIns="0" rIns="0" bIns="0" rtlCol="0" anchor="t"/>
           <a:lstStyle/>
           <a:p>
-            <a:pPr algn="l" indent="0" marL="0">
-              <a:lnSpc>
-                <a:spcPts val="1680"/>
-              </a:lnSpc>
-              <a:spcBef>
-                <a:spcPts val="300"/>
-              </a:spcBef>
-              <a:spcAft>
-                <a:spcPts val="300"/>
-              </a:spcAft>
-              <a:buNone/>
+            <a:pPr algn="l" marL="342900" indent="-342900">
+              <a:lnSpc>
+                <a:spcPts val="1620"/>
+              </a:lnSpc>
+              <a:spcAft>
+                <a:spcPts val="300"/>
+              </a:spcAft>
+              <a:buSzPct val="100000"/>
+              <a:buChar char="•"/>
             </a:pPr>
             <a:r>
               <a:rPr lang="en-US" sz="1200" dirty="0">
@@ -5172,22 +6763,23 @@
                 <a:ea typeface="Arial" pitchFamily="34" charset="-122"/>
                 <a:cs typeface="Arial" pitchFamily="34" charset="-120"/>
               </a:rPr>
-              <a:t>– Write the same problem on the board. – Solve it using the </a:t>
-            </a:r>
-            <a:pPr algn="l" indent="0" marL="0">
-              <a:lnSpc>
-                <a:spcPts val="1680"/>
-              </a:lnSpc>
-              <a:spcBef>
-                <a:spcPts val="300"/>
-              </a:spcBef>
-              <a:spcAft>
-                <a:spcPts val="300"/>
-              </a:spcAft>
-              <a:buNone/>
-            </a:pPr>
-            <a:r>
-              <a:rPr lang="en-US" sz="1200" b="1" dirty="0">
+              <a:t>Hand out the baseline sheet face-down.</a:t>
+            </a:r>
+            <a:endParaRPr lang="en-US" sz="1200" dirty="0"/>
+          </a:p>
+          <a:p>
+            <a:pPr algn="l" marL="342900" indent="-342900">
+              <a:lnSpc>
+                <a:spcPts val="1620"/>
+              </a:lnSpc>
+              <a:spcAft>
+                <a:spcPts val="300"/>
+              </a:spcAft>
+              <a:buSzPct val="100000"/>
+              <a:buChar char="•"/>
+            </a:pPr>
+            <a:r>
+              <a:rPr lang="en-US" sz="1200" dirty="0">
                 <a:solidFill>
                   <a:srgbClr val="1C2833"/>
                 </a:solidFill>
@@ -5195,19 +6787,20 @@
                 <a:ea typeface="Arial" pitchFamily="34" charset="-122"/>
                 <a:cs typeface="Arial" pitchFamily="34" charset="-120"/>
               </a:rPr>
-              <a:t>dot method</a:t>
-            </a:r>
-            <a:pPr algn="l" indent="0" marL="0">
-              <a:lnSpc>
-                <a:spcPts val="1680"/>
-              </a:lnSpc>
-              <a:spcBef>
-                <a:spcPts val="300"/>
-              </a:spcBef>
-              <a:spcAft>
-                <a:spcPts val="300"/>
-              </a:spcAft>
-              <a:buNone/>
+              <a:t>Students write their name and predicted time on the back.</a:t>
+            </a:r>
+            <a:endParaRPr lang="en-US" sz="1200" dirty="0"/>
+          </a:p>
+          <a:p>
+            <a:pPr algn="l" marL="342900" indent="-342900">
+              <a:lnSpc>
+                <a:spcPts val="1620"/>
+              </a:lnSpc>
+              <a:spcAft>
+                <a:spcPts val="300"/>
+              </a:spcAft>
+              <a:buSzPct val="100000"/>
+              <a:buChar char="•"/>
             </a:pPr>
             <a:r>
               <a:rPr lang="en-US" sz="1200" dirty="0">
@@ -5218,268 +6811,23 @@
                 <a:ea typeface="Arial" pitchFamily="34" charset="-122"/>
                 <a:cs typeface="Arial" pitchFamily="34" charset="-120"/>
               </a:rPr>
-              <a:t>, narrating:</a:t>
+              <a:t>On "Go," flip and solve using whatever method they normally use (standard algorithm).</a:t>
             </a:r>
             <a:endParaRPr lang="en-US" sz="1200" dirty="0"/>
           </a:p>
-        </p:txBody>
-      </p:sp>
-      <p:sp>
-        <p:nvSpPr>
-          <p:cNvPr id="5" name="Text 3"/>
-          <p:cNvSpPr/>
-          <p:nvPr/>
-        </p:nvSpPr>
-        <p:spPr>
-          <a:xfrm>
-            <a:off x="406301" y="1173063"/>
-            <a:ext cx="8331398" cy="952202"/>
-          </a:xfrm>
-          <a:prstGeom prst="rect">
-            <a:avLst/>
-          </a:prstGeom>
-          <a:solidFill>
-            <a:srgbClr val="F4F8F9"/>
-          </a:solidFill>
-          <a:ln/>
-        </p:spPr>
-        <p:txBody>
-          <a:bodyPr wrap="square" rtlCol="0" anchor="ctr"/>
-          <a:lstStyle/>
-          <a:p>
-            <a:pPr indent="0" marL="0">
-              <a:buNone/>
-            </a:pPr>
-            <a:endParaRPr lang="en-US" dirty="0"/>
-          </a:p>
-        </p:txBody>
-      </p:sp>
-      <p:sp>
-        <p:nvSpPr>
-          <p:cNvPr id="6" name="Shape 4"/>
-          <p:cNvSpPr/>
-          <p:nvPr/>
-        </p:nvSpPr>
-        <p:spPr>
-          <a:xfrm>
-            <a:off x="430113" y="1173063"/>
-            <a:ext cx="0" cy="952202"/>
-          </a:xfrm>
-          <a:prstGeom prst="line">
-            <a:avLst/>
-          </a:prstGeom>
-          <a:noFill/>
-          <a:ln w="47625">
-            <a:solidFill>
-              <a:srgbClr val="277884"/>
-            </a:solidFill>
-            <a:prstDash val="solid"/>
-          </a:ln>
-        </p:spPr>
-      </p:sp>
-      <p:sp>
-        <p:nvSpPr>
-          <p:cNvPr id="7" name="Text 5"/>
-          <p:cNvSpPr/>
-          <p:nvPr/>
-        </p:nvSpPr>
-        <p:spPr>
-          <a:xfrm>
-            <a:off x="631627" y="1300014"/>
-            <a:ext cx="8086939" cy="174575"/>
-          </a:xfrm>
-          <a:prstGeom prst="rect">
-            <a:avLst/>
-          </a:prstGeom>
-          <a:noFill/>
-          <a:ln/>
-        </p:spPr>
-        <p:txBody>
-          <a:bodyPr wrap="square" lIns="0" tIns="0" rIns="0" bIns="0" rtlCol="0" anchor="t"/>
-          <a:lstStyle/>
-          <a:p>
-            <a:pPr algn="l" indent="0" marL="0">
-              <a:lnSpc>
-                <a:spcPts val="1375"/>
-              </a:lnSpc>
-              <a:buNone/>
-            </a:pPr>
-            <a:r>
-              <a:rPr lang="en-US" sz="1100" dirty="0">
-                <a:solidFill>
-                  <a:srgbClr val="1C2833"/>
-                </a:solidFill>
-                <a:latin typeface="Courier New" pitchFamily="34" charset="0"/>
-                <a:ea typeface="Courier New" pitchFamily="34" charset="-122"/>
-                <a:cs typeface="Courier New" pitchFamily="34" charset="-120"/>
-              </a:rPr>
-              <a:t>5728</a:t>
-            </a:r>
-            <a:endParaRPr lang="en-US" sz="1100" dirty="0"/>
-          </a:p>
-        </p:txBody>
-      </p:sp>
-      <p:sp>
-        <p:nvSpPr>
-          <p:cNvPr id="8" name="Text 6"/>
-          <p:cNvSpPr/>
-          <p:nvPr/>
-        </p:nvSpPr>
-        <p:spPr>
-          <a:xfrm>
-            <a:off x="631627" y="1474589"/>
-            <a:ext cx="8086939" cy="174575"/>
-          </a:xfrm>
-          <a:prstGeom prst="rect">
-            <a:avLst/>
-          </a:prstGeom>
-          <a:noFill/>
-          <a:ln/>
-        </p:spPr>
-        <p:txBody>
-          <a:bodyPr wrap="square" lIns="0" tIns="0" rIns="0" bIns="0" rtlCol="0" anchor="t"/>
-          <a:lstStyle/>
-          <a:p>
-            <a:pPr algn="l" indent="0" marL="0">
-              <a:lnSpc>
-                <a:spcPts val="1375"/>
-              </a:lnSpc>
-              <a:buNone/>
-            </a:pPr>
-            <a:r>
-              <a:rPr lang="en-US" sz="1100" dirty="0">
-                <a:solidFill>
-                  <a:srgbClr val="1C2833"/>
-                </a:solidFill>
-                <a:latin typeface="Courier New" pitchFamily="34" charset="0"/>
-                <a:ea typeface="Courier New" pitchFamily="34" charset="-122"/>
-                <a:cs typeface="Courier New" pitchFamily="34" charset="-120"/>
-              </a:rPr>
-              <a:t>3417</a:t>
-            </a:r>
-            <a:endParaRPr lang="en-US" sz="1100" dirty="0"/>
-          </a:p>
-        </p:txBody>
-      </p:sp>
-      <p:sp>
-        <p:nvSpPr>
-          <p:cNvPr id="9" name="Text 7"/>
-          <p:cNvSpPr/>
-          <p:nvPr/>
-        </p:nvSpPr>
-        <p:spPr>
-          <a:xfrm>
-            <a:off x="631627" y="1649164"/>
-            <a:ext cx="8086939" cy="174575"/>
-          </a:xfrm>
-          <a:prstGeom prst="rect">
-            <a:avLst/>
-          </a:prstGeom>
-          <a:noFill/>
-          <a:ln/>
-        </p:spPr>
-        <p:txBody>
-          <a:bodyPr wrap="square" lIns="0" tIns="0" rIns="0" bIns="0" rtlCol="0" anchor="t"/>
-          <a:lstStyle/>
-          <a:p>
-            <a:pPr algn="l" indent="0" marL="0">
-              <a:lnSpc>
-                <a:spcPts val="1375"/>
-              </a:lnSpc>
-              <a:buNone/>
-            </a:pPr>
-            <a:r>
-              <a:rPr lang="en-US" sz="1100" dirty="0">
-                <a:solidFill>
-                  <a:srgbClr val="1C2833"/>
-                </a:solidFill>
-                <a:latin typeface="Courier New" pitchFamily="34" charset="0"/>
-                <a:ea typeface="Courier New" pitchFamily="34" charset="-122"/>
-                <a:cs typeface="Courier New" pitchFamily="34" charset="-120"/>
-              </a:rPr>
-              <a:t>6892</a:t>
-            </a:r>
-            <a:endParaRPr lang="en-US" sz="1100" dirty="0"/>
-          </a:p>
-        </p:txBody>
-      </p:sp>
-      <p:sp>
-        <p:nvSpPr>
-          <p:cNvPr id="10" name="Text 8"/>
-          <p:cNvSpPr/>
-          <p:nvPr/>
-        </p:nvSpPr>
-        <p:spPr>
-          <a:xfrm>
-            <a:off x="631627" y="1823740"/>
-            <a:ext cx="8086939" cy="174575"/>
-          </a:xfrm>
-          <a:prstGeom prst="rect">
-            <a:avLst/>
-          </a:prstGeom>
-          <a:noFill/>
-          <a:ln/>
-        </p:spPr>
-        <p:txBody>
-          <a:bodyPr wrap="square" lIns="0" tIns="0" rIns="0" bIns="0" rtlCol="0" anchor="t"/>
-          <a:lstStyle/>
-          <a:p>
-            <a:pPr algn="l" indent="0" marL="0">
-              <a:lnSpc>
-                <a:spcPts val="1375"/>
-              </a:lnSpc>
-              <a:buNone/>
-            </a:pPr>
-            <a:r>
-              <a:rPr lang="en-US" sz="1100" dirty="0">
-                <a:solidFill>
-                  <a:srgbClr val="1C2833"/>
-                </a:solidFill>
-                <a:latin typeface="Courier New" pitchFamily="34" charset="0"/>
-                <a:ea typeface="Courier New" pitchFamily="34" charset="-122"/>
-                <a:cs typeface="Courier New" pitchFamily="34" charset="-120"/>
-              </a:rPr>
-              <a:t>4536+</a:t>
-            </a:r>
-            <a:endParaRPr lang="en-US" sz="1100" dirty="0"/>
-          </a:p>
-        </p:txBody>
-      </p:sp>
-      <p:sp>
-        <p:nvSpPr>
-          <p:cNvPr id="11" name="Text 9"/>
-          <p:cNvSpPr/>
-          <p:nvPr/>
-        </p:nvSpPr>
-        <p:spPr>
-          <a:xfrm>
-            <a:off x="406301" y="2214116"/>
-            <a:ext cx="8498026" cy="639812"/>
-          </a:xfrm>
-          <a:prstGeom prst="rect">
-            <a:avLst/>
-          </a:prstGeom>
-          <a:noFill/>
-          <a:ln/>
-        </p:spPr>
-        <p:txBody>
-          <a:bodyPr wrap="square" lIns="0" tIns="0" rIns="0" bIns="0" rtlCol="0" anchor="t"/>
-          <a:lstStyle/>
-          <a:p>
-            <a:pPr algn="l" indent="0" marL="0">
-              <a:lnSpc>
-                <a:spcPts val="1680"/>
-              </a:lnSpc>
-              <a:spcBef>
-                <a:spcPts val="300"/>
-              </a:spcBef>
-              <a:spcAft>
-                <a:spcPts val="300"/>
-              </a:spcAft>
-              <a:buNone/>
-            </a:pPr>
-            <a:r>
-              <a:rPr lang="en-US" sz="1200" b="1" dirty="0">
+          <a:p>
+            <a:pPr algn="l" marL="342900" indent="-342900">
+              <a:lnSpc>
+                <a:spcPts val="1620"/>
+              </a:lnSpc>
+              <a:spcAft>
+                <a:spcPts val="300"/>
+              </a:spcAft>
+              <a:buSzPct val="100000"/>
+              <a:buChar char="•"/>
+            </a:pPr>
+            <a:r>
+              <a:rPr lang="en-US" sz="1200" dirty="0">
                 <a:solidFill>
                   <a:srgbClr val="1C2833"/>
                 </a:solidFill>
@@ -5487,19 +6835,20 @@
                 <a:ea typeface="Arial" pitchFamily="34" charset="-122"/>
                 <a:cs typeface="Arial" pitchFamily="34" charset="-120"/>
               </a:rPr>
-              <a:t>Units column (top to bottom):</a:t>
-            </a:r>
-            <a:pPr algn="l" indent="0" marL="0">
-              <a:lnSpc>
-                <a:spcPts val="1680"/>
-              </a:lnSpc>
-              <a:spcBef>
-                <a:spcPts val="300"/>
-              </a:spcBef>
-              <a:spcAft>
-                <a:spcPts val="300"/>
-              </a:spcAft>
-              <a:buNone/>
+              <a:t>Record their actual time (the wall clock is running).</a:t>
+            </a:r>
+            <a:endParaRPr lang="en-US" sz="1200" dirty="0"/>
+          </a:p>
+          <a:p>
+            <a:pPr algn="l" marL="342900" indent="-342900">
+              <a:lnSpc>
+                <a:spcPts val="1620"/>
+              </a:lnSpc>
+              <a:spcAft>
+                <a:spcPts val="300"/>
+              </a:spcAft>
+              <a:buSzPct val="100000"/>
+              <a:buChar char="•"/>
             </a:pPr>
             <a:r>
               <a:rPr lang="en-US" sz="1200" dirty="0">
@@ -5510,15 +6859,12 @@
                 <a:ea typeface="Arial" pitchFamily="34" charset="-122"/>
                 <a:cs typeface="Arial" pitchFamily="34" charset="-120"/>
               </a:rPr>
-              <a:t> 8, 7, 2, 6. – Scan: 8 + 2 = 10. Mark a dot above the 2. Running total: 0. – Continue: 7. Running total: 7. – Continue: 6. Running total: 13. That's a 10 — mark a dot above the 6. Running total: 3. – Final: write </a:t>
-            </a:r>
-            <a:pPr algn="l" indent="0" marL="0">
-              <a:lnSpc>
-                <a:spcPts val="1680"/>
-              </a:lnSpc>
-              <a:spcBef>
-                <a:spcPts val="300"/>
-              </a:spcBef>
+              <a:t>Mark answer; </a:t>
+            </a:r>
+            <a:pPr algn="l" indent="0" marL="0">
+              <a:lnSpc>
+                <a:spcPts val="1620"/>
+              </a:lnSpc>
               <a:spcAft>
                 <a:spcPts val="300"/>
               </a:spcAft>
@@ -5533,15 +6879,12 @@
                 <a:ea typeface="Arial" pitchFamily="34" charset="-122"/>
                 <a:cs typeface="Arial" pitchFamily="34" charset="-120"/>
               </a:rPr>
-              <a:t>3</a:t>
-            </a:r>
-            <a:pPr algn="l" indent="0" marL="0">
-              <a:lnSpc>
-                <a:spcPts val="1680"/>
-              </a:lnSpc>
-              <a:spcBef>
-                <a:spcPts val="300"/>
-              </a:spcBef>
+              <a:t>honest self-correction</a:t>
+            </a:r>
+            <a:pPr algn="l" indent="0" marL="0">
+              <a:lnSpc>
+                <a:spcPts val="1620"/>
+              </a:lnSpc>
               <a:spcAft>
                 <a:spcPts val="300"/>
               </a:spcAft>
@@ -5556,53 +6899,7 @@
                 <a:ea typeface="Arial" pitchFamily="34" charset="-122"/>
                 <a:cs typeface="Arial" pitchFamily="34" charset="-120"/>
               </a:rPr>
-              <a:t> under the column. – Count dots: </a:t>
-            </a:r>
-            <a:pPr algn="l" indent="0" marL="0">
-              <a:lnSpc>
-                <a:spcPts val="1680"/>
-              </a:lnSpc>
-              <a:spcBef>
-                <a:spcPts val="300"/>
-              </a:spcBef>
-              <a:spcAft>
-                <a:spcPts val="300"/>
-              </a:spcAft>
-              <a:buNone/>
-            </a:pPr>
-            <a:r>
-              <a:rPr lang="en-US" sz="1200" b="1" dirty="0">
-                <a:solidFill>
-                  <a:srgbClr val="1C2833"/>
-                </a:solidFill>
-                <a:latin typeface="Arial" pitchFamily="34" charset="0"/>
-                <a:ea typeface="Arial" pitchFamily="34" charset="-122"/>
-                <a:cs typeface="Arial" pitchFamily="34" charset="-120"/>
-              </a:rPr>
-              <a:t>2</a:t>
-            </a:r>
-            <a:pPr algn="l" indent="0" marL="0">
-              <a:lnSpc>
-                <a:spcPts val="1680"/>
-              </a:lnSpc>
-              <a:spcBef>
-                <a:spcPts val="300"/>
-              </a:spcBef>
-              <a:spcAft>
-                <a:spcPts val="300"/>
-              </a:spcAft>
-              <a:buNone/>
-            </a:pPr>
-            <a:r>
-              <a:rPr lang="en-US" sz="1200" dirty="0">
-                <a:solidFill>
-                  <a:srgbClr val="1C2833"/>
-                </a:solidFill>
-                <a:latin typeface="Arial" pitchFamily="34" charset="0"/>
-                <a:ea typeface="Arial" pitchFamily="34" charset="-122"/>
-                <a:cs typeface="Arial" pitchFamily="34" charset="-120"/>
-              </a:rPr>
-              <a:t>. Carry 2 to the next column.</a:t>
+              <a:t> — they're racing themselves over the module, not each other.</a:t>
             </a:r>
             <a:endParaRPr lang="en-US" sz="1200" dirty="0"/>
           </a:p>
@@ -5610,452 +6907,13 @@
       </p:sp>
       <p:sp>
         <p:nvSpPr>
-          <p:cNvPr id="12" name="Text 10"/>
-          <p:cNvSpPr/>
-          <p:nvPr/>
-        </p:nvSpPr>
-        <p:spPr>
-          <a:xfrm>
-            <a:off x="406301" y="2942779"/>
-            <a:ext cx="8331398" cy="1301353"/>
-          </a:xfrm>
-          <a:prstGeom prst="rect">
-            <a:avLst/>
-          </a:prstGeom>
-          <a:solidFill>
-            <a:srgbClr val="F4F8F9"/>
-          </a:solidFill>
-          <a:ln/>
-        </p:spPr>
-        <p:txBody>
-          <a:bodyPr wrap="square" rtlCol="0" anchor="ctr"/>
-          <a:lstStyle/>
-          <a:p>
-            <a:pPr indent="0" marL="0">
-              <a:buNone/>
-            </a:pPr>
-            <a:endParaRPr lang="en-US" dirty="0"/>
-          </a:p>
-        </p:txBody>
-      </p:sp>
-      <p:sp>
-        <p:nvSpPr>
-          <p:cNvPr id="13" name="Shape 11"/>
-          <p:cNvSpPr/>
-          <p:nvPr/>
-        </p:nvSpPr>
-        <p:spPr>
-          <a:xfrm>
-            <a:off x="430113" y="2942779"/>
-            <a:ext cx="0" cy="1301353"/>
-          </a:xfrm>
-          <a:prstGeom prst="line">
-            <a:avLst/>
-          </a:prstGeom>
-          <a:noFill/>
-          <a:ln w="47625">
-            <a:solidFill>
-              <a:srgbClr val="277884"/>
-            </a:solidFill>
-            <a:prstDash val="solid"/>
-          </a:ln>
-        </p:spPr>
-      </p:sp>
-      <p:sp>
-        <p:nvSpPr>
-          <p:cNvPr id="14" name="Text 12"/>
-          <p:cNvSpPr/>
-          <p:nvPr/>
-        </p:nvSpPr>
-        <p:spPr>
-          <a:xfrm>
-            <a:off x="631627" y="3069729"/>
-            <a:ext cx="8086939" cy="174575"/>
-          </a:xfrm>
-          <a:prstGeom prst="rect">
-            <a:avLst/>
-          </a:prstGeom>
-          <a:noFill/>
-          <a:ln/>
-        </p:spPr>
-        <p:txBody>
-          <a:bodyPr wrap="square" lIns="0" tIns="0" rIns="0" bIns="0" rtlCol="0" anchor="t"/>
-          <a:lstStyle/>
-          <a:p>
-            <a:pPr algn="l" indent="0" marL="0">
-              <a:lnSpc>
-                <a:spcPts val="1375"/>
-              </a:lnSpc>
-              <a:buNone/>
-            </a:pPr>
-            <a:r>
-              <a:rPr lang="en-US" sz="1100" dirty="0">
-                <a:solidFill>
-                  <a:srgbClr val="1C2833"/>
-                </a:solidFill>
-                <a:latin typeface="Courier New" pitchFamily="34" charset="0"/>
-                <a:ea typeface="Courier New" pitchFamily="34" charset="-122"/>
-                <a:cs typeface="Courier New" pitchFamily="34" charset="-120"/>
-              </a:rPr>
-              <a:t>·  ·</a:t>
-            </a:r>
-            <a:endParaRPr lang="en-US" sz="1100" dirty="0"/>
-          </a:p>
-        </p:txBody>
-      </p:sp>
-      <p:sp>
-        <p:nvSpPr>
-          <p:cNvPr id="15" name="Text 13"/>
-          <p:cNvSpPr/>
-          <p:nvPr/>
-        </p:nvSpPr>
-        <p:spPr>
-          <a:xfrm>
-            <a:off x="631627" y="3244304"/>
-            <a:ext cx="8086939" cy="174575"/>
-          </a:xfrm>
-          <a:prstGeom prst="rect">
-            <a:avLst/>
-          </a:prstGeom>
-          <a:noFill/>
-          <a:ln/>
-        </p:spPr>
-        <p:txBody>
-          <a:bodyPr wrap="square" lIns="0" tIns="0" rIns="0" bIns="0" rtlCol="0" anchor="t"/>
-          <a:lstStyle/>
-          <a:p>
-            <a:pPr algn="l" indent="0" marL="0">
-              <a:lnSpc>
-                <a:spcPts val="1375"/>
-              </a:lnSpc>
-              <a:buNone/>
-            </a:pPr>
-            <a:r>
-              <a:rPr lang="en-US" sz="1100" dirty="0">
-                <a:solidFill>
-                  <a:srgbClr val="1C2833"/>
-                </a:solidFill>
-                <a:latin typeface="Courier New" pitchFamily="34" charset="0"/>
-                <a:ea typeface="Courier New" pitchFamily="34" charset="-122"/>
-                <a:cs typeface="Courier New" pitchFamily="34" charset="-120"/>
-              </a:rPr>
-              <a:t>5728</a:t>
-            </a:r>
-            <a:endParaRPr lang="en-US" sz="1100" dirty="0"/>
-          </a:p>
-        </p:txBody>
-      </p:sp>
-      <p:sp>
-        <p:nvSpPr>
-          <p:cNvPr id="16" name="Text 14"/>
-          <p:cNvSpPr/>
-          <p:nvPr/>
-        </p:nvSpPr>
-        <p:spPr>
-          <a:xfrm>
-            <a:off x="631627" y="3418880"/>
-            <a:ext cx="8086939" cy="174575"/>
-          </a:xfrm>
-          <a:prstGeom prst="rect">
-            <a:avLst/>
-          </a:prstGeom>
-          <a:noFill/>
-          <a:ln/>
-        </p:spPr>
-        <p:txBody>
-          <a:bodyPr wrap="square" lIns="0" tIns="0" rIns="0" bIns="0" rtlCol="0" anchor="t"/>
-          <a:lstStyle/>
-          <a:p>
-            <a:pPr algn="l" indent="0" marL="0">
-              <a:lnSpc>
-                <a:spcPts val="1375"/>
-              </a:lnSpc>
-              <a:buNone/>
-            </a:pPr>
-            <a:r>
-              <a:rPr lang="en-US" sz="1100" dirty="0">
-                <a:solidFill>
-                  <a:srgbClr val="1C2833"/>
-                </a:solidFill>
-                <a:latin typeface="Courier New" pitchFamily="34" charset="0"/>
-                <a:ea typeface="Courier New" pitchFamily="34" charset="-122"/>
-                <a:cs typeface="Courier New" pitchFamily="34" charset="-120"/>
-              </a:rPr>
-              <a:t>3417</a:t>
-            </a:r>
-            <a:endParaRPr lang="en-US" sz="1100" dirty="0"/>
-          </a:p>
-        </p:txBody>
-      </p:sp>
-      <p:sp>
-        <p:nvSpPr>
-          <p:cNvPr id="17" name="Text 15"/>
-          <p:cNvSpPr/>
-          <p:nvPr/>
-        </p:nvSpPr>
-        <p:spPr>
-          <a:xfrm>
-            <a:off x="631627" y="3593455"/>
-            <a:ext cx="8086939" cy="174575"/>
-          </a:xfrm>
-          <a:prstGeom prst="rect">
-            <a:avLst/>
-          </a:prstGeom>
-          <a:noFill/>
-          <a:ln/>
-        </p:spPr>
-        <p:txBody>
-          <a:bodyPr wrap="square" lIns="0" tIns="0" rIns="0" bIns="0" rtlCol="0" anchor="t"/>
-          <a:lstStyle/>
-          <a:p>
-            <a:pPr algn="l" indent="0" marL="0">
-              <a:lnSpc>
-                <a:spcPts val="1375"/>
-              </a:lnSpc>
-              <a:buNone/>
-            </a:pPr>
-            <a:r>
-              <a:rPr lang="en-US" sz="1100" dirty="0">
-                <a:solidFill>
-                  <a:srgbClr val="1C2833"/>
-                </a:solidFill>
-                <a:latin typeface="Courier New" pitchFamily="34" charset="0"/>
-                <a:ea typeface="Courier New" pitchFamily="34" charset="-122"/>
-                <a:cs typeface="Courier New" pitchFamily="34" charset="-120"/>
-              </a:rPr>
-              <a:t>6892</a:t>
-            </a:r>
-            <a:endParaRPr lang="en-US" sz="1100" dirty="0"/>
-          </a:p>
-        </p:txBody>
-      </p:sp>
-      <p:sp>
-        <p:nvSpPr>
-          <p:cNvPr id="18" name="Text 16"/>
-          <p:cNvSpPr/>
-          <p:nvPr/>
-        </p:nvSpPr>
-        <p:spPr>
-          <a:xfrm>
-            <a:off x="631627" y="3768030"/>
-            <a:ext cx="8086939" cy="174575"/>
-          </a:xfrm>
-          <a:prstGeom prst="rect">
-            <a:avLst/>
-          </a:prstGeom>
-          <a:noFill/>
-          <a:ln/>
-        </p:spPr>
-        <p:txBody>
-          <a:bodyPr wrap="square" lIns="0" tIns="0" rIns="0" bIns="0" rtlCol="0" anchor="t"/>
-          <a:lstStyle/>
-          <a:p>
-            <a:pPr algn="l" indent="0" marL="0">
-              <a:lnSpc>
-                <a:spcPts val="1375"/>
-              </a:lnSpc>
-              <a:buNone/>
-            </a:pPr>
-            <a:r>
-              <a:rPr lang="en-US" sz="1100" dirty="0">
-                <a:solidFill>
-                  <a:srgbClr val="1C2833"/>
-                </a:solidFill>
-                <a:latin typeface="Courier New" pitchFamily="34" charset="0"/>
-                <a:ea typeface="Courier New" pitchFamily="34" charset="-122"/>
-                <a:cs typeface="Courier New" pitchFamily="34" charset="-120"/>
-              </a:rPr>
-              <a:t>4536+</a:t>
-            </a:r>
-            <a:endParaRPr lang="en-US" sz="1100" dirty="0"/>
-          </a:p>
-        </p:txBody>
-      </p:sp>
-      <p:sp>
-        <p:nvSpPr>
-          <p:cNvPr id="19" name="Text 17"/>
-          <p:cNvSpPr/>
-          <p:nvPr/>
-        </p:nvSpPr>
-        <p:spPr>
-          <a:xfrm>
-            <a:off x="631627" y="3942606"/>
-            <a:ext cx="8086939" cy="174575"/>
-          </a:xfrm>
-          <a:prstGeom prst="rect">
-            <a:avLst/>
-          </a:prstGeom>
-          <a:noFill/>
-          <a:ln/>
-        </p:spPr>
-        <p:txBody>
-          <a:bodyPr wrap="square" lIns="0" tIns="0" rIns="0" bIns="0" rtlCol="0" anchor="t"/>
-          <a:lstStyle/>
-          <a:p>
-            <a:pPr algn="l" indent="0" marL="0">
-              <a:lnSpc>
-                <a:spcPts val="1375"/>
-              </a:lnSpc>
-              <a:buNone/>
-            </a:pPr>
-            <a:r>
-              <a:rPr lang="en-US" sz="1100" dirty="0">
-                <a:solidFill>
-                  <a:srgbClr val="1C2833"/>
-                </a:solidFill>
-                <a:latin typeface="Courier New" pitchFamily="34" charset="0"/>
-                <a:ea typeface="Courier New" pitchFamily="34" charset="-122"/>
-                <a:cs typeface="Courier New" pitchFamily="34" charset="-120"/>
-              </a:rPr>
-              <a:t>3</a:t>
-            </a:r>
-            <a:endParaRPr lang="en-US" sz="1100" dirty="0"/>
-          </a:p>
-        </p:txBody>
-      </p:sp>
-      <p:sp>
-        <p:nvSpPr>
-          <p:cNvPr id="20" name="Text 18"/>
-          <p:cNvSpPr/>
-          <p:nvPr/>
-        </p:nvSpPr>
-        <p:spPr>
-          <a:xfrm>
-            <a:off x="406301" y="4332982"/>
-            <a:ext cx="8498026" cy="213271"/>
-          </a:xfrm>
-          <a:prstGeom prst="rect">
-            <a:avLst/>
-          </a:prstGeom>
-          <a:noFill/>
-          <a:ln/>
-        </p:spPr>
-        <p:txBody>
-          <a:bodyPr wrap="square" lIns="0" tIns="0" rIns="0" bIns="0" rtlCol="0" anchor="t"/>
-          <a:lstStyle/>
-          <a:p>
-            <a:pPr algn="l" indent="0" marL="0">
-              <a:lnSpc>
-                <a:spcPts val="1680"/>
-              </a:lnSpc>
-              <a:spcBef>
-                <a:spcPts val="300"/>
-              </a:spcBef>
-              <a:spcAft>
-                <a:spcPts val="300"/>
-              </a:spcAft>
-              <a:buNone/>
-            </a:pPr>
-            <a:r>
-              <a:rPr lang="en-US" sz="1200" dirty="0">
-                <a:solidFill>
-                  <a:srgbClr val="1C2833"/>
-                </a:solidFill>
-                <a:latin typeface="Arial" pitchFamily="34" charset="0"/>
-                <a:ea typeface="Arial" pitchFamily="34" charset="-122"/>
-                <a:cs typeface="Arial" pitchFamily="34" charset="-120"/>
-              </a:rPr>
-              <a:t>Continue for tens, hundreds, thousands columns. Reveal answer.</a:t>
-            </a:r>
-            <a:endParaRPr lang="en-US" sz="1200" dirty="0"/>
-          </a:p>
-        </p:txBody>
-      </p:sp>
-      <p:sp>
-        <p:nvSpPr>
-          <p:cNvPr id="21" name="Text 19"/>
-          <p:cNvSpPr/>
-          <p:nvPr/>
-        </p:nvSpPr>
-        <p:spPr>
-          <a:xfrm>
-            <a:off x="634901" y="4635103"/>
-            <a:ext cx="8102798" cy="281880"/>
-          </a:xfrm>
-          <a:prstGeom prst="rect">
-            <a:avLst/>
-          </a:prstGeom>
-          <a:noFill/>
-          <a:ln/>
-        </p:spPr>
-        <p:txBody>
-          <a:bodyPr wrap="square" lIns="0" tIns="0" rIns="0" bIns="0" rtlCol="0" anchor="t"/>
-          <a:lstStyle/>
-          <a:p>
-            <a:pPr algn="l" marL="342900" indent="-342900">
-              <a:lnSpc>
-                <a:spcPts val="1620"/>
-              </a:lnSpc>
-              <a:spcAft>
-                <a:spcPts val="300"/>
-              </a:spcAft>
-              <a:buSzPct val="100000"/>
-              <a:buChar char="•"/>
-            </a:pPr>
-            <a:r>
-              <a:rPr lang="en-US" sz="1200" i="1" dirty="0">
-                <a:solidFill>
-                  <a:srgbClr val="1C2833"/>
-                </a:solidFill>
-                <a:latin typeface="Arial" pitchFamily="34" charset="0"/>
-                <a:ea typeface="Arial" pitchFamily="34" charset="-122"/>
-                <a:cs typeface="Arial" pitchFamily="34" charset="-120"/>
-              </a:rPr>
-              <a:t>"Notice: I never stopped to think 'what's 8 + 7 + 2 + 6?' I just</a:t>
-            </a:r>
-            <a:pPr algn="l" indent="0" marL="0">
-              <a:lnSpc>
-                <a:spcPts val="1620"/>
-              </a:lnSpc>
-              <a:spcAft>
-                <a:spcPts val="300"/>
-              </a:spcAft>
-              <a:buNone/>
-            </a:pPr>
-            <a:r>
-              <a:rPr lang="en-US" sz="1200" dirty="0">
-                <a:solidFill>
-                  <a:srgbClr val="1C2833"/>
-                </a:solidFill>
-                <a:latin typeface="Arial" pitchFamily="34" charset="0"/>
-                <a:ea typeface="Arial" pitchFamily="34" charset="-122"/>
-                <a:cs typeface="Arial" pitchFamily="34" charset="-120"/>
-              </a:rPr>
-              <a:t>scanned</a:t>
-            </a:r>
-            <a:pPr algn="l" indent="0" marL="0">
-              <a:lnSpc>
-                <a:spcPts val="1620"/>
-              </a:lnSpc>
-              <a:spcAft>
-                <a:spcPts val="300"/>
-              </a:spcAft>
-              <a:buNone/>
-            </a:pPr>
-            <a:r>
-              <a:rPr lang="en-US" sz="1200" i="1" dirty="0">
-                <a:solidFill>
-                  <a:srgbClr val="1C2833"/>
-                </a:solidFill>
-                <a:latin typeface="Arial" pitchFamily="34" charset="0"/>
-                <a:ea typeface="Arial" pitchFamily="34" charset="-122"/>
-                <a:cs typeface="Arial" pitchFamily="34" charset="-120"/>
-              </a:rPr>
-              <a:t> for pairs that make 10."</a:t>
-            </a:r>
-            <a:endParaRPr lang="en-US" sz="1200" dirty="0"/>
-          </a:p>
-        </p:txBody>
-      </p:sp>
-      <p:sp>
-        <p:nvSpPr>
-          <p:cNvPr id="22" name="Text 20"/>
-          <p:cNvSpPr/>
-          <p:nvPr/>
-        </p:nvSpPr>
-        <p:spPr>
-          <a:xfrm>
-            <a:off x="406301" y="5082034"/>
+          <p:cNvPr id="5" name="Text 3"/>
+          <p:cNvSpPr/>
+          <p:nvPr/>
+        </p:nvSpPr>
+        <p:spPr>
+          <a:xfrm>
+            <a:off x="406301" y="4434929"/>
             <a:ext cx="8498026" cy="213271"/>
           </a:xfrm>
           <a:prstGeom prst="rect">
@@ -6199,7 +7057,7 @@
                 <a:ea typeface="Georgia" pitchFamily="34" charset="-122"/>
                 <a:cs typeface="Georgia" pitchFamily="34" charset="-120"/>
               </a:rPr>
-              <a:t>Activity (15 min) — First try</a:t>
+              <a:t>Teacher demonstration (10 min)</a:t>
             </a:r>
             <a:endParaRPr lang="en-US" sz="1800" dirty="0"/>
           </a:p>
@@ -6213,8 +7071,8 @@
         </p:nvSpPr>
         <p:spPr>
           <a:xfrm>
-            <a:off x="406301" y="870942"/>
-            <a:ext cx="8498026" cy="426541"/>
+            <a:off x="634901" y="883593"/>
+            <a:ext cx="8102798" cy="525661"/>
           </a:xfrm>
           <a:prstGeom prst="rect">
             <a:avLst/>
@@ -6226,17 +7084,15 @@
           <a:bodyPr wrap="square" lIns="0" tIns="0" rIns="0" bIns="0" rtlCol="0" anchor="t"/>
           <a:lstStyle/>
           <a:p>
-            <a:pPr algn="l" indent="0" marL="0">
-              <a:lnSpc>
-                <a:spcPts val="1680"/>
-              </a:lnSpc>
-              <a:spcBef>
-                <a:spcPts val="300"/>
-              </a:spcBef>
-              <a:spcAft>
-                <a:spcPts val="300"/>
-              </a:spcAft>
-              <a:buNone/>
+            <a:pPr algn="l" marL="342900" indent="-342900">
+              <a:lnSpc>
+                <a:spcPts val="1620"/>
+              </a:lnSpc>
+              <a:spcAft>
+                <a:spcPts val="300"/>
+              </a:spcAft>
+              <a:buSzPct val="100000"/>
+              <a:buChar char="•"/>
             </a:pPr>
             <a:r>
               <a:rPr lang="en-US" sz="1200" dirty="0">
@@ -6247,22 +7103,23 @@
                 <a:ea typeface="Arial" pitchFamily="34" charset="-122"/>
                 <a:cs typeface="Arial" pitchFamily="34" charset="-120"/>
               </a:rPr>
-              <a:t>– Students re-do the same problem using the dot method on the </a:t>
-            </a:r>
-            <a:pPr algn="l" indent="0" marL="0">
-              <a:lnSpc>
-                <a:spcPts val="1680"/>
-              </a:lnSpc>
-              <a:spcBef>
-                <a:spcPts val="300"/>
-              </a:spcBef>
-              <a:spcAft>
-                <a:spcPts val="300"/>
-              </a:spcAft>
-              <a:buNone/>
-            </a:pPr>
-            <a:r>
-              <a:rPr lang="en-US" sz="1200" i="1" dirty="0">
+              <a:t>Write the same problem on the board.</a:t>
+            </a:r>
+            <a:endParaRPr lang="en-US" sz="1200" dirty="0"/>
+          </a:p>
+          <a:p>
+            <a:pPr algn="l" marL="342900" indent="-342900">
+              <a:lnSpc>
+                <a:spcPts val="1620"/>
+              </a:lnSpc>
+              <a:spcAft>
+                <a:spcPts val="300"/>
+              </a:spcAft>
+              <a:buSzPct val="100000"/>
+              <a:buChar char="•"/>
+            </a:pPr>
+            <a:r>
+              <a:rPr lang="en-US" sz="1200" dirty="0">
                 <a:solidFill>
                   <a:srgbClr val="1C2833"/>
                 </a:solidFill>
@@ -6270,22 +7127,19 @@
                 <a:ea typeface="Arial" pitchFamily="34" charset="-122"/>
                 <a:cs typeface="Arial" pitchFamily="34" charset="-120"/>
               </a:rPr>
-              <a:t>back</a:t>
-            </a:r>
-            <a:pPr algn="l" indent="0" marL="0">
-              <a:lnSpc>
-                <a:spcPts val="1680"/>
-              </a:lnSpc>
-              <a:spcBef>
-                <a:spcPts val="300"/>
-              </a:spcBef>
-              <a:spcAft>
-                <a:spcPts val="300"/>
-              </a:spcAft>
-              <a:buNone/>
-            </a:pPr>
-            <a:r>
-              <a:rPr lang="en-US" sz="1200" dirty="0">
+              <a:t>Solve it using the </a:t>
+            </a:r>
+            <a:pPr algn="l" indent="0" marL="0">
+              <a:lnSpc>
+                <a:spcPts val="1620"/>
+              </a:lnSpc>
+              <a:spcAft>
+                <a:spcPts val="300"/>
+              </a:spcAft>
+              <a:buNone/>
+            </a:pPr>
+            <a:r>
+              <a:rPr lang="en-US" sz="1200" b="1" dirty="0">
                 <a:solidFill>
                   <a:srgbClr val="1C2833"/>
                 </a:solidFill>
@@ -6293,7 +7147,27 @@
                 <a:ea typeface="Arial" pitchFamily="34" charset="-122"/>
                 <a:cs typeface="Arial" pitchFamily="34" charset="-120"/>
               </a:rPr>
-              <a:t> of their baseline sheet. – Time themselves again. – Compare: how much slower (or faster) was the dot method on the FIRST try?</a:t>
+              <a:t>dot method</a:t>
+            </a:r>
+            <a:pPr algn="l" indent="0" marL="0">
+              <a:lnSpc>
+                <a:spcPts val="1620"/>
+              </a:lnSpc>
+              <a:spcAft>
+                <a:spcPts val="300"/>
+              </a:spcAft>
+              <a:buNone/>
+            </a:pPr>
+            <a:r>
+              <a:rPr lang="en-US" sz="1200" dirty="0">
+                <a:solidFill>
+                  <a:srgbClr val="1C2833"/>
+                </a:solidFill>
+                <a:latin typeface="Arial" pitchFamily="34" charset="0"/>
+                <a:ea typeface="Arial" pitchFamily="34" charset="-122"/>
+                <a:cs typeface="Arial" pitchFamily="34" charset="-120"/>
+              </a:rPr>
+              <a:t>, narrating:</a:t>
             </a:r>
             <a:endParaRPr lang="en-US" sz="1200" dirty="0"/>
           </a:p>
@@ -6302,6 +7176,227 @@
       <p:sp>
         <p:nvSpPr>
           <p:cNvPr id="5" name="Text 3"/>
+          <p:cNvSpPr/>
+          <p:nvPr/>
+        </p:nvSpPr>
+        <p:spPr>
+          <a:xfrm>
+            <a:off x="406301" y="1510754"/>
+            <a:ext cx="8331398" cy="952202"/>
+          </a:xfrm>
+          <a:prstGeom prst="rect">
+            <a:avLst/>
+          </a:prstGeom>
+          <a:solidFill>
+            <a:srgbClr val="F4F8F9"/>
+          </a:solidFill>
+          <a:ln/>
+        </p:spPr>
+        <p:txBody>
+          <a:bodyPr wrap="square" rtlCol="0" anchor="ctr"/>
+          <a:lstStyle/>
+          <a:p>
+            <a:pPr indent="0" marL="0">
+              <a:buNone/>
+            </a:pPr>
+            <a:endParaRPr lang="en-US" dirty="0"/>
+          </a:p>
+        </p:txBody>
+      </p:sp>
+      <p:sp>
+        <p:nvSpPr>
+          <p:cNvPr id="6" name="Shape 4"/>
+          <p:cNvSpPr/>
+          <p:nvPr/>
+        </p:nvSpPr>
+        <p:spPr>
+          <a:xfrm>
+            <a:off x="430113" y="1510754"/>
+            <a:ext cx="0" cy="952202"/>
+          </a:xfrm>
+          <a:prstGeom prst="line">
+            <a:avLst/>
+          </a:prstGeom>
+          <a:noFill/>
+          <a:ln w="47625">
+            <a:solidFill>
+              <a:srgbClr val="277884"/>
+            </a:solidFill>
+            <a:prstDash val="solid"/>
+          </a:ln>
+        </p:spPr>
+      </p:sp>
+      <p:sp>
+        <p:nvSpPr>
+          <p:cNvPr id="7" name="Text 5"/>
+          <p:cNvSpPr/>
+          <p:nvPr/>
+        </p:nvSpPr>
+        <p:spPr>
+          <a:xfrm>
+            <a:off x="631627" y="1637705"/>
+            <a:ext cx="8086939" cy="174575"/>
+          </a:xfrm>
+          <a:prstGeom prst="rect">
+            <a:avLst/>
+          </a:prstGeom>
+          <a:noFill/>
+          <a:ln/>
+        </p:spPr>
+        <p:txBody>
+          <a:bodyPr wrap="square" lIns="0" tIns="0" rIns="0" bIns="0" rtlCol="0" anchor="t"/>
+          <a:lstStyle/>
+          <a:p>
+            <a:pPr algn="l" indent="0" marL="0">
+              <a:lnSpc>
+                <a:spcPts val="1375"/>
+              </a:lnSpc>
+              <a:buNone/>
+            </a:pPr>
+            <a:r>
+              <a:rPr lang="en-US" sz="1100" dirty="0">
+                <a:solidFill>
+                  <a:srgbClr val="1C2833"/>
+                </a:solidFill>
+                <a:latin typeface="Courier New" pitchFamily="34" charset="0"/>
+                <a:ea typeface="Courier New" pitchFamily="34" charset="-122"/>
+                <a:cs typeface="Courier New" pitchFamily="34" charset="-120"/>
+              </a:rPr>
+              <a:t>5728</a:t>
+            </a:r>
+            <a:endParaRPr lang="en-US" sz="1100" dirty="0"/>
+          </a:p>
+        </p:txBody>
+      </p:sp>
+      <p:sp>
+        <p:nvSpPr>
+          <p:cNvPr id="8" name="Text 6"/>
+          <p:cNvSpPr/>
+          <p:nvPr/>
+        </p:nvSpPr>
+        <p:spPr>
+          <a:xfrm>
+            <a:off x="631627" y="1812280"/>
+            <a:ext cx="8086939" cy="174575"/>
+          </a:xfrm>
+          <a:prstGeom prst="rect">
+            <a:avLst/>
+          </a:prstGeom>
+          <a:noFill/>
+          <a:ln/>
+        </p:spPr>
+        <p:txBody>
+          <a:bodyPr wrap="square" lIns="0" tIns="0" rIns="0" bIns="0" rtlCol="0" anchor="t"/>
+          <a:lstStyle/>
+          <a:p>
+            <a:pPr algn="l" indent="0" marL="0">
+              <a:lnSpc>
+                <a:spcPts val="1375"/>
+              </a:lnSpc>
+              <a:buNone/>
+            </a:pPr>
+            <a:r>
+              <a:rPr lang="en-US" sz="1100" dirty="0">
+                <a:solidFill>
+                  <a:srgbClr val="1C2833"/>
+                </a:solidFill>
+                <a:latin typeface="Courier New" pitchFamily="34" charset="0"/>
+                <a:ea typeface="Courier New" pitchFamily="34" charset="-122"/>
+                <a:cs typeface="Courier New" pitchFamily="34" charset="-120"/>
+              </a:rPr>
+              <a:t>3417</a:t>
+            </a:r>
+            <a:endParaRPr lang="en-US" sz="1100" dirty="0"/>
+          </a:p>
+        </p:txBody>
+      </p:sp>
+      <p:sp>
+        <p:nvSpPr>
+          <p:cNvPr id="9" name="Text 7"/>
+          <p:cNvSpPr/>
+          <p:nvPr/>
+        </p:nvSpPr>
+        <p:spPr>
+          <a:xfrm>
+            <a:off x="631627" y="1986855"/>
+            <a:ext cx="8086939" cy="174575"/>
+          </a:xfrm>
+          <a:prstGeom prst="rect">
+            <a:avLst/>
+          </a:prstGeom>
+          <a:noFill/>
+          <a:ln/>
+        </p:spPr>
+        <p:txBody>
+          <a:bodyPr wrap="square" lIns="0" tIns="0" rIns="0" bIns="0" rtlCol="0" anchor="t"/>
+          <a:lstStyle/>
+          <a:p>
+            <a:pPr algn="l" indent="0" marL="0">
+              <a:lnSpc>
+                <a:spcPts val="1375"/>
+              </a:lnSpc>
+              <a:buNone/>
+            </a:pPr>
+            <a:r>
+              <a:rPr lang="en-US" sz="1100" dirty="0">
+                <a:solidFill>
+                  <a:srgbClr val="1C2833"/>
+                </a:solidFill>
+                <a:latin typeface="Courier New" pitchFamily="34" charset="0"/>
+                <a:ea typeface="Courier New" pitchFamily="34" charset="-122"/>
+                <a:cs typeface="Courier New" pitchFamily="34" charset="-120"/>
+              </a:rPr>
+              <a:t>6892</a:t>
+            </a:r>
+            <a:endParaRPr lang="en-US" sz="1100" dirty="0"/>
+          </a:p>
+        </p:txBody>
+      </p:sp>
+      <p:sp>
+        <p:nvSpPr>
+          <p:cNvPr id="10" name="Text 8"/>
+          <p:cNvSpPr/>
+          <p:nvPr/>
+        </p:nvSpPr>
+        <p:spPr>
+          <a:xfrm>
+            <a:off x="631627" y="2161431"/>
+            <a:ext cx="8086939" cy="174575"/>
+          </a:xfrm>
+          <a:prstGeom prst="rect">
+            <a:avLst/>
+          </a:prstGeom>
+          <a:noFill/>
+          <a:ln/>
+        </p:spPr>
+        <p:txBody>
+          <a:bodyPr wrap="square" lIns="0" tIns="0" rIns="0" bIns="0" rtlCol="0" anchor="t"/>
+          <a:lstStyle/>
+          <a:p>
+            <a:pPr algn="l" indent="0" marL="0">
+              <a:lnSpc>
+                <a:spcPts val="1375"/>
+              </a:lnSpc>
+              <a:buNone/>
+            </a:pPr>
+            <a:r>
+              <a:rPr lang="en-US" sz="1100" dirty="0">
+                <a:solidFill>
+                  <a:srgbClr val="1C2833"/>
+                </a:solidFill>
+                <a:latin typeface="Courier New" pitchFamily="34" charset="0"/>
+                <a:ea typeface="Courier New" pitchFamily="34" charset="-122"/>
+                <a:cs typeface="Courier New" pitchFamily="34" charset="-120"/>
+              </a:rPr>
+              <a:t>4536+</a:t>
+            </a:r>
+            <a:endParaRPr lang="en-US" sz="1100" dirty="0"/>
+          </a:p>
+        </p:txBody>
+      </p:sp>
+      <p:sp>
+        <p:nvSpPr>
+          <p:cNvPr id="11" name="Text 9"/>
           <p:cNvSpPr/>
           <p:nvPr/>
         </p:nvSpPr>
@@ -6451,7 +7546,7 @@
                 <a:ea typeface="Georgia" pitchFamily="34" charset="-122"/>
                 <a:cs typeface="Georgia" pitchFamily="34" charset="-120"/>
               </a:rPr>
-              <a:t>Wrap-up (5 min)</a:t>
+              <a:t>Teacher demonstration (10 min) (cont.)</a:t>
             </a:r>
             <a:endParaRPr lang="en-US" sz="1800" dirty="0"/>
           </a:p>
@@ -6466,7 +7561,7 @@
         <p:spPr>
           <a:xfrm>
             <a:off x="406301" y="870942"/>
-            <a:ext cx="8498026" cy="639812"/>
+            <a:ext cx="8498026" cy="213271"/>
           </a:xfrm>
           <a:prstGeom prst="rect">
             <a:avLst/>
@@ -6491,7 +7586,7 @@
               <a:buNone/>
             </a:pPr>
             <a:r>
-              <a:rPr lang="en-US" sz="1200" dirty="0">
+              <a:rPr lang="en-US" sz="1200" b="1" dirty="0">
                 <a:solidFill>
                   <a:srgbClr val="1C2833"/>
                 </a:solidFill>
@@ -6499,7 +7594,30 @@
                 <a:ea typeface="Arial" pitchFamily="34" charset="-122"/>
                 <a:cs typeface="Arial" pitchFamily="34" charset="-120"/>
               </a:rPr>
-              <a:t>– Show of hands: who was faster with the dot method on first try? Who was slower? (Most will be slower — that's expected. The speedup comes after 3–4 days of practice.) – Preview Day 2: "Tomorrow we'll work on the foundational skill — instantly seeing pairs that make 10."</a:t>
+              <a:t>Units column (top to bottom):</a:t>
+            </a:r>
+            <a:pPr algn="l" indent="0" marL="0">
+              <a:lnSpc>
+                <a:spcPts val="1680"/>
+              </a:lnSpc>
+              <a:spcBef>
+                <a:spcPts val="300"/>
+              </a:spcBef>
+              <a:spcAft>
+                <a:spcPts val="300"/>
+              </a:spcAft>
+              <a:buNone/>
+            </a:pPr>
+            <a:r>
+              <a:rPr lang="en-US" sz="1200" dirty="0">
+                <a:solidFill>
+                  <a:srgbClr val="1C2833"/>
+                </a:solidFill>
+                <a:latin typeface="Arial" pitchFamily="34" charset="0"/>
+                <a:ea typeface="Arial" pitchFamily="34" charset="-122"/>
+                <a:cs typeface="Arial" pitchFamily="34" charset="-120"/>
+              </a:rPr>
+              <a:t> 8, 7, 2, 6.</a:t>
             </a:r>
             <a:endParaRPr lang="en-US" sz="1200" dirty="0"/>
           </a:p>
@@ -6508,6 +7626,228 @@
       <p:sp>
         <p:nvSpPr>
           <p:cNvPr id="5" name="Text 3"/>
+          <p:cNvSpPr/>
+          <p:nvPr/>
+        </p:nvSpPr>
+        <p:spPr>
+          <a:xfrm>
+            <a:off x="634901" y="1173063"/>
+            <a:ext cx="8102798" cy="1257002"/>
+          </a:xfrm>
+          <a:prstGeom prst="rect">
+            <a:avLst/>
+          </a:prstGeom>
+          <a:noFill/>
+          <a:ln/>
+        </p:spPr>
+        <p:txBody>
+          <a:bodyPr wrap="square" lIns="0" tIns="0" rIns="0" bIns="0" rtlCol="0" anchor="t"/>
+          <a:lstStyle/>
+          <a:p>
+            <a:pPr algn="l" marL="342900" indent="-342900">
+              <a:lnSpc>
+                <a:spcPts val="1620"/>
+              </a:lnSpc>
+              <a:spcAft>
+                <a:spcPts val="300"/>
+              </a:spcAft>
+              <a:buSzPct val="100000"/>
+              <a:buChar char="•"/>
+            </a:pPr>
+            <a:r>
+              <a:rPr lang="en-US" sz="1200" dirty="0">
+                <a:solidFill>
+                  <a:srgbClr val="1C2833"/>
+                </a:solidFill>
+                <a:latin typeface="Arial" pitchFamily="34" charset="0"/>
+                <a:ea typeface="Arial" pitchFamily="34" charset="-122"/>
+                <a:cs typeface="Arial" pitchFamily="34" charset="-120"/>
+              </a:rPr>
+              <a:t>Scan: 8 + 2 = 10. Mark a dot above the 2. Running total: 0.</a:t>
+            </a:r>
+            <a:endParaRPr lang="en-US" sz="1200" dirty="0"/>
+          </a:p>
+          <a:p>
+            <a:pPr algn="l" marL="342900" indent="-342900">
+              <a:lnSpc>
+                <a:spcPts val="1620"/>
+              </a:lnSpc>
+              <a:spcAft>
+                <a:spcPts val="300"/>
+              </a:spcAft>
+              <a:buSzPct val="100000"/>
+              <a:buChar char="•"/>
+            </a:pPr>
+            <a:r>
+              <a:rPr lang="en-US" sz="1200" dirty="0">
+                <a:solidFill>
+                  <a:srgbClr val="1C2833"/>
+                </a:solidFill>
+                <a:latin typeface="Arial" pitchFamily="34" charset="0"/>
+                <a:ea typeface="Arial" pitchFamily="34" charset="-122"/>
+                <a:cs typeface="Arial" pitchFamily="34" charset="-120"/>
+              </a:rPr>
+              <a:t>Continue: 7. Running total: 7.</a:t>
+            </a:r>
+            <a:endParaRPr lang="en-US" sz="1200" dirty="0"/>
+          </a:p>
+          <a:p>
+            <a:pPr algn="l" marL="342900" indent="-342900">
+              <a:lnSpc>
+                <a:spcPts val="1620"/>
+              </a:lnSpc>
+              <a:spcAft>
+                <a:spcPts val="300"/>
+              </a:spcAft>
+              <a:buSzPct val="100000"/>
+              <a:buChar char="•"/>
+            </a:pPr>
+            <a:r>
+              <a:rPr lang="en-US" sz="1200" dirty="0">
+                <a:solidFill>
+                  <a:srgbClr val="1C2833"/>
+                </a:solidFill>
+                <a:latin typeface="Arial" pitchFamily="34" charset="0"/>
+                <a:ea typeface="Arial" pitchFamily="34" charset="-122"/>
+                <a:cs typeface="Arial" pitchFamily="34" charset="-120"/>
+              </a:rPr>
+              <a:t>Continue: 6. Running total: 13. That's a 10 — mark a dot above the 6. Running total: 3.</a:t>
+            </a:r>
+            <a:endParaRPr lang="en-US" sz="1200" dirty="0"/>
+          </a:p>
+          <a:p>
+            <a:pPr algn="l" marL="342900" indent="-342900">
+              <a:lnSpc>
+                <a:spcPts val="1620"/>
+              </a:lnSpc>
+              <a:spcAft>
+                <a:spcPts val="300"/>
+              </a:spcAft>
+              <a:buSzPct val="100000"/>
+              <a:buChar char="•"/>
+            </a:pPr>
+            <a:r>
+              <a:rPr lang="en-US" sz="1200" dirty="0">
+                <a:solidFill>
+                  <a:srgbClr val="1C2833"/>
+                </a:solidFill>
+                <a:latin typeface="Arial" pitchFamily="34" charset="0"/>
+                <a:ea typeface="Arial" pitchFamily="34" charset="-122"/>
+                <a:cs typeface="Arial" pitchFamily="34" charset="-120"/>
+              </a:rPr>
+              <a:t>Final: write </a:t>
+            </a:r>
+            <a:pPr algn="l" indent="0" marL="0">
+              <a:lnSpc>
+                <a:spcPts val="1620"/>
+              </a:lnSpc>
+              <a:spcAft>
+                <a:spcPts val="300"/>
+              </a:spcAft>
+              <a:buNone/>
+            </a:pPr>
+            <a:r>
+              <a:rPr lang="en-US" sz="1200" b="1" dirty="0">
+                <a:solidFill>
+                  <a:srgbClr val="1C2833"/>
+                </a:solidFill>
+                <a:latin typeface="Arial" pitchFamily="34" charset="0"/>
+                <a:ea typeface="Arial" pitchFamily="34" charset="-122"/>
+                <a:cs typeface="Arial" pitchFamily="34" charset="-120"/>
+              </a:rPr>
+              <a:t>3</a:t>
+            </a:r>
+            <a:pPr algn="l" indent="0" marL="0">
+              <a:lnSpc>
+                <a:spcPts val="1620"/>
+              </a:lnSpc>
+              <a:spcAft>
+                <a:spcPts val="300"/>
+              </a:spcAft>
+              <a:buNone/>
+            </a:pPr>
+            <a:r>
+              <a:rPr lang="en-US" sz="1200" dirty="0">
+                <a:solidFill>
+                  <a:srgbClr val="1C2833"/>
+                </a:solidFill>
+                <a:latin typeface="Arial" pitchFamily="34" charset="0"/>
+                <a:ea typeface="Arial" pitchFamily="34" charset="-122"/>
+                <a:cs typeface="Arial" pitchFamily="34" charset="-120"/>
+              </a:rPr>
+              <a:t> under the column.</a:t>
+            </a:r>
+            <a:endParaRPr lang="en-US" sz="1200" dirty="0"/>
+          </a:p>
+          <a:p>
+            <a:pPr algn="l" marL="342900" indent="-342900">
+              <a:lnSpc>
+                <a:spcPts val="1620"/>
+              </a:lnSpc>
+              <a:spcAft>
+                <a:spcPts val="300"/>
+              </a:spcAft>
+              <a:buSzPct val="100000"/>
+              <a:buChar char="•"/>
+            </a:pPr>
+            <a:r>
+              <a:rPr lang="en-US" sz="1200" dirty="0">
+                <a:solidFill>
+                  <a:srgbClr val="1C2833"/>
+                </a:solidFill>
+                <a:latin typeface="Arial" pitchFamily="34" charset="0"/>
+                <a:ea typeface="Arial" pitchFamily="34" charset="-122"/>
+                <a:cs typeface="Arial" pitchFamily="34" charset="-120"/>
+              </a:rPr>
+              <a:t>Count dots: </a:t>
+            </a:r>
+            <a:pPr algn="l" indent="0" marL="0">
+              <a:lnSpc>
+                <a:spcPts val="1620"/>
+              </a:lnSpc>
+              <a:spcAft>
+                <a:spcPts val="300"/>
+              </a:spcAft>
+              <a:buNone/>
+            </a:pPr>
+            <a:r>
+              <a:rPr lang="en-US" sz="1200" b="1" dirty="0">
+                <a:solidFill>
+                  <a:srgbClr val="1C2833"/>
+                </a:solidFill>
+                <a:latin typeface="Arial" pitchFamily="34" charset="0"/>
+                <a:ea typeface="Arial" pitchFamily="34" charset="-122"/>
+                <a:cs typeface="Arial" pitchFamily="34" charset="-120"/>
+              </a:rPr>
+              <a:t>2</a:t>
+            </a:r>
+            <a:pPr algn="l" indent="0" marL="0">
+              <a:lnSpc>
+                <a:spcPts val="1620"/>
+              </a:lnSpc>
+              <a:spcAft>
+                <a:spcPts val="300"/>
+              </a:spcAft>
+              <a:buNone/>
+            </a:pPr>
+            <a:r>
+              <a:rPr lang="en-US" sz="1200" dirty="0">
+                <a:solidFill>
+                  <a:srgbClr val="1C2833"/>
+                </a:solidFill>
+                <a:latin typeface="Arial" pitchFamily="34" charset="0"/>
+                <a:ea typeface="Arial" pitchFamily="34" charset="-122"/>
+                <a:cs typeface="Arial" pitchFamily="34" charset="-120"/>
+              </a:rPr>
+              <a:t>. Carry 2 to the next column.</a:t>
+            </a:r>
+            <a:endParaRPr lang="en-US" sz="1200" dirty="0"/>
+          </a:p>
+        </p:txBody>
+      </p:sp>
+      <p:sp>
+        <p:nvSpPr>
+          <p:cNvPr id="6" name="Text 4"/>
           <p:cNvSpPr/>
           <p:nvPr/>
         </p:nvSpPr>
